--- a/Software Engineering Capstone/05.5. Other Coding Agents.pptx
+++ b/Software Engineering Capstone/05.5. Other Coding Agents.pptx
@@ -259,7 +259,7 @@
             <a:fld id="{50D0DBAB-D1C9-4D1B-A41F-EB0AC0278643}" type="datetimeFigureOut">
               <a:rPr lang="en-US" smtClean="0"/>
               <a:pPr/>
-              <a:t>5/7/2026</a:t>
+              <a:t>6/11/2026</a:t>
             </a:fld>
             <a:endParaRPr lang="en-US"/>
           </a:p>
@@ -421,7 +421,7 @@
             <a:fld id="{51300FB1-EAA8-41B6-84E0-C0BE923892D9}" type="datetimeFigureOut">
               <a:rPr lang="en-US" smtClean="0"/>
               <a:pPr/>
-              <a:t>5/7/2026</a:t>
+              <a:t>6/11/2026</a:t>
             </a:fld>
             <a:endParaRPr lang="en-US"/>
           </a:p>
@@ -878,7 +878,7 @@
               <a:pPr>
                 <a:defRPr/>
               </a:pPr>
-              <a:t>5/7/2026</a:t>
+              <a:t>6/11/2026</a:t>
             </a:fld>
             <a:endParaRPr lang="en-US"/>
           </a:p>
@@ -1070,7 +1070,7 @@
               <a:pPr>
                 <a:defRPr/>
               </a:pPr>
-              <a:t>5/7/2026</a:t>
+              <a:t>6/11/2026</a:t>
             </a:fld>
             <a:endParaRPr lang="en-US"/>
           </a:p>
@@ -1272,7 +1272,7 @@
               <a:pPr>
                 <a:defRPr/>
               </a:pPr>
-              <a:t>5/7/2026</a:t>
+              <a:t>6/11/2026</a:t>
             </a:fld>
             <a:endParaRPr lang="en-US"/>
           </a:p>
@@ -1464,7 +1464,7 @@
               <a:pPr>
                 <a:defRPr/>
               </a:pPr>
-              <a:t>5/7/2026</a:t>
+              <a:t>6/11/2026</a:t>
             </a:fld>
             <a:endParaRPr lang="en-US"/>
           </a:p>
@@ -1732,7 +1732,7 @@
               <a:pPr>
                 <a:defRPr/>
               </a:pPr>
-              <a:t>5/7/2026</a:t>
+              <a:t>6/11/2026</a:t>
             </a:fld>
             <a:endParaRPr lang="en-US"/>
           </a:p>
@@ -2042,7 +2042,7 @@
               <a:pPr>
                 <a:defRPr/>
               </a:pPr>
-              <a:t>5/7/2026</a:t>
+              <a:t>6/11/2026</a:t>
             </a:fld>
             <a:endParaRPr lang="en-US"/>
           </a:p>
@@ -2486,7 +2486,7 @@
               <a:pPr>
                 <a:defRPr/>
               </a:pPr>
-              <a:t>5/7/2026</a:t>
+              <a:t>6/11/2026</a:t>
             </a:fld>
             <a:endParaRPr lang="en-US"/>
           </a:p>
@@ -2626,7 +2626,7 @@
               <a:pPr>
                 <a:defRPr/>
               </a:pPr>
-              <a:t>5/7/2026</a:t>
+              <a:t>6/11/2026</a:t>
             </a:fld>
             <a:endParaRPr lang="en-US"/>
           </a:p>
@@ -2743,7 +2743,7 @@
               <a:pPr>
                 <a:defRPr/>
               </a:pPr>
-              <a:t>5/7/2026</a:t>
+              <a:t>6/11/2026</a:t>
             </a:fld>
             <a:endParaRPr lang="en-US"/>
           </a:p>
@@ -3042,7 +3042,7 @@
               <a:pPr>
                 <a:defRPr/>
               </a:pPr>
-              <a:t>5/7/2026</a:t>
+              <a:t>6/11/2026</a:t>
             </a:fld>
             <a:endParaRPr lang="en-US"/>
           </a:p>
@@ -3320,7 +3320,7 @@
               <a:pPr>
                 <a:defRPr/>
               </a:pPr>
-              <a:t>5/7/2026</a:t>
+              <a:t>6/11/2026</a:t>
             </a:fld>
             <a:endParaRPr lang="en-US"/>
           </a:p>
@@ -3568,7 +3568,7 @@
               <a:pPr>
                 <a:defRPr/>
               </a:pPr>
-              <a:t>5/7/2026</a:t>
+              <a:t>6/11/2026</a:t>
             </a:fld>
             <a:endParaRPr lang="en-US"/>
           </a:p>
@@ -6714,7 +6714,11 @@
             <a:pPr algn="l"/>
             <a:r>
               <a:rPr lang="en-US" dirty="0" smtClean="0"/>
-              <a:t>1. Install Codex CLI</a:t>
+              <a:t>1. Install Codex </a:t>
+            </a:r>
+            <a:r>
+              <a:rPr lang="en-US" dirty="0" smtClean="0"/>
+              <a:t>CLI  on Windows</a:t>
             </a:r>
             <a:endParaRPr lang="en-US" dirty="0"/>
           </a:p>
@@ -6736,72 +6740,109 @@
           <a:lstStyle/>
           <a:p>
             <a:r>
-              <a:rPr lang="en-US" sz="2400" dirty="0" smtClean="0">
+              <a:rPr lang="en-US" sz="2200" dirty="0" smtClean="0">
                 <a:hlinkClick r:id="rId2"/>
               </a:rPr>
               <a:t>https://</a:t>
             </a:r>
             <a:r>
-              <a:rPr lang="en-US" sz="2400" dirty="0" smtClean="0">
+              <a:rPr lang="en-US" sz="2200" dirty="0" smtClean="0">
                 <a:hlinkClick r:id="rId2"/>
               </a:rPr>
               <a:t>developers.openai.com/codex/cli</a:t>
             </a:r>
-            <a:endParaRPr lang="en-US" sz="2400" dirty="0" smtClean="0"/>
-          </a:p>
-          <a:p>
-            <a:r>
-              <a:rPr lang="en-US" sz="2400" dirty="0" err="1" smtClean="0"/>
+            <a:endParaRPr lang="en-US" sz="2200" dirty="0" smtClean="0"/>
+          </a:p>
+          <a:p>
+            <a:r>
+              <a:rPr lang="en-US" sz="2200" dirty="0" err="1" smtClean="0"/>
+              <a:t>powershell</a:t>
+            </a:r>
+            <a:r>
+              <a:rPr lang="en-US" sz="2200" dirty="0" smtClean="0"/>
+              <a:t> -</a:t>
+            </a:r>
+            <a:r>
+              <a:rPr lang="en-US" sz="2200" dirty="0" err="1" smtClean="0"/>
+              <a:t>ExecutionPolicy</a:t>
+            </a:r>
+            <a:r>
+              <a:rPr lang="en-US" sz="2200" dirty="0" smtClean="0"/>
+              <a:t> </a:t>
+            </a:r>
+            <a:r>
+              <a:rPr lang="en-US" sz="2200" dirty="0" err="1" smtClean="0"/>
+              <a:t>ByPass</a:t>
+            </a:r>
+            <a:r>
+              <a:rPr lang="en-US" sz="2200" dirty="0" smtClean="0"/>
+              <a:t> -c "</a:t>
+            </a:r>
+            <a:r>
+              <a:rPr lang="en-US" sz="2200" dirty="0" err="1" smtClean="0"/>
+              <a:t>irm</a:t>
+            </a:r>
+            <a:r>
+              <a:rPr lang="en-US" sz="2200" dirty="0" smtClean="0"/>
+              <a:t> https://chatgpt.com/codex/install.ps1 | </a:t>
+            </a:r>
+            <a:r>
+              <a:rPr lang="en-US" sz="2200" dirty="0" err="1" smtClean="0"/>
+              <a:t>iex</a:t>
+            </a:r>
+            <a:r>
+              <a:rPr lang="en-US" sz="2200" dirty="0" smtClean="0"/>
+              <a:t>"</a:t>
+            </a:r>
+            <a:endParaRPr lang="en-US" sz="2200" dirty="0" smtClean="0"/>
+          </a:p>
+          <a:p>
+            <a:r>
+              <a:rPr lang="en-US" sz="2200" dirty="0" smtClean="0"/>
+              <a:t># </a:t>
+            </a:r>
+            <a:r>
+              <a:rPr lang="en-US" sz="2200" dirty="0" err="1" smtClean="0"/>
               <a:t>npm</a:t>
             </a:r>
             <a:r>
-              <a:rPr lang="en-US" sz="2400" dirty="0" smtClean="0"/>
+              <a:rPr lang="en-US" sz="2200" dirty="0" smtClean="0"/>
               <a:t> </a:t>
             </a:r>
             <a:r>
-              <a:rPr lang="en-US" sz="2400" dirty="0" err="1" smtClean="0"/>
+              <a:rPr lang="en-US" sz="2200" dirty="0" err="1" smtClean="0"/>
               <a:t>i</a:t>
             </a:r>
             <a:r>
-              <a:rPr lang="en-US" sz="2400" dirty="0" smtClean="0"/>
+              <a:rPr lang="en-US" sz="2200" dirty="0" smtClean="0"/>
               <a:t> -g @</a:t>
             </a:r>
             <a:r>
-              <a:rPr lang="en-US" sz="2400" dirty="0" err="1" smtClean="0"/>
+              <a:rPr lang="en-US" sz="2200" dirty="0" err="1" smtClean="0"/>
               <a:t>openai</a:t>
             </a:r>
             <a:r>
-              <a:rPr lang="en-US" sz="2400" dirty="0" smtClean="0"/>
+              <a:rPr lang="en-US" sz="2200" dirty="0" smtClean="0"/>
               <a:t>/codex</a:t>
             </a:r>
           </a:p>
           <a:p>
             <a:r>
-              <a:rPr lang="en-US" sz="2400" dirty="0" smtClean="0"/>
-              <a:t># Add </a:t>
-            </a:r>
-            <a:r>
-              <a:rPr lang="en-US" sz="2400" dirty="0" smtClean="0"/>
-              <a:t>C:\</a:t>
-            </a:r>
-            <a:r>
-              <a:rPr lang="en-US" sz="2400" dirty="0" smtClean="0"/>
-              <a:t>Users\admin\AppData\Roaming\npm to PATH</a:t>
-            </a:r>
-            <a:endParaRPr lang="en-US" sz="2400" dirty="0" smtClean="0"/>
-          </a:p>
-          <a:p>
-            <a:r>
-              <a:rPr lang="en-US" sz="2400" dirty="0" smtClean="0"/>
+              <a:rPr lang="en-US" sz="2200" dirty="0" smtClean="0"/>
+              <a:t># Add C:\Users\admin\AppData\Roaming\npm to PATH</a:t>
+            </a:r>
+          </a:p>
+          <a:p>
+            <a:r>
+              <a:rPr lang="en-US" sz="2200" dirty="0" smtClean="0"/>
               <a:t>codex --version</a:t>
             </a:r>
-            <a:endParaRPr lang="en-US" sz="2400" dirty="0" smtClean="0"/>
           </a:p>
         </p:txBody>
       </p:sp>
       <p:pic>
         <p:nvPicPr>
-          <p:cNvPr id="1027" name="Picture 3"/>
+          <p:cNvPr id="1026" name="Picture 2"/>
           <p:cNvPicPr>
             <a:picLocks noChangeAspect="1" noChangeArrowheads="1"/>
           </p:cNvPicPr>
@@ -6816,8 +6857,8 @@
         </p:blipFill>
         <p:spPr bwMode="auto">
           <a:xfrm>
-            <a:off x="1752600" y="3810000"/>
-            <a:ext cx="5394960" cy="1685925"/>
+            <a:off x="1828800" y="4343400"/>
+            <a:ext cx="5505450" cy="1651635"/>
           </a:xfrm>
           <a:prstGeom prst="rect">
             <a:avLst/>

--- a/Software Engineering Capstone/05.5. Other Coding Agents.pptx
+++ b/Software Engineering Capstone/05.5. Other Coding Agents.pptx
@@ -5,10 +5,10 @@
     <p:sldMasterId id="2147483708" r:id="rId1"/>
   </p:sldMasterIdLst>
   <p:notesMasterIdLst>
-    <p:notesMasterId r:id="rId36"/>
+    <p:notesMasterId r:id="rId39"/>
   </p:notesMasterIdLst>
   <p:handoutMasterIdLst>
-    <p:handoutMasterId r:id="rId37"/>
+    <p:handoutMasterId r:id="rId40"/>
   </p:handoutMasterIdLst>
   <p:sldIdLst>
     <p:sldId id="256" r:id="rId2"/>
@@ -21,30 +21,33 @@
     <p:sldId id="564" r:id="rId9"/>
     <p:sldId id="565" r:id="rId10"/>
     <p:sldId id="557" r:id="rId11"/>
-    <p:sldId id="569" r:id="rId12"/>
-    <p:sldId id="596" r:id="rId13"/>
-    <p:sldId id="594" r:id="rId14"/>
-    <p:sldId id="595" r:id="rId15"/>
-    <p:sldId id="578" r:id="rId16"/>
-    <p:sldId id="544" r:id="rId17"/>
-    <p:sldId id="546" r:id="rId18"/>
-    <p:sldId id="545" r:id="rId19"/>
-    <p:sldId id="547" r:id="rId20"/>
-    <p:sldId id="523" r:id="rId21"/>
-    <p:sldId id="535" r:id="rId22"/>
-    <p:sldId id="538" r:id="rId23"/>
-    <p:sldId id="536" r:id="rId24"/>
-    <p:sldId id="537" r:id="rId25"/>
-    <p:sldId id="542" r:id="rId26"/>
-    <p:sldId id="524" r:id="rId27"/>
-    <p:sldId id="567" r:id="rId28"/>
-    <p:sldId id="572" r:id="rId29"/>
-    <p:sldId id="519" r:id="rId30"/>
-    <p:sldId id="521" r:id="rId31"/>
-    <p:sldId id="522" r:id="rId32"/>
-    <p:sldId id="512" r:id="rId33"/>
-    <p:sldId id="513" r:id="rId34"/>
-    <p:sldId id="343" r:id="rId35"/>
+    <p:sldId id="601" r:id="rId12"/>
+    <p:sldId id="602" r:id="rId13"/>
+    <p:sldId id="600" r:id="rId14"/>
+    <p:sldId id="569" r:id="rId15"/>
+    <p:sldId id="596" r:id="rId16"/>
+    <p:sldId id="594" r:id="rId17"/>
+    <p:sldId id="595" r:id="rId18"/>
+    <p:sldId id="578" r:id="rId19"/>
+    <p:sldId id="544" r:id="rId20"/>
+    <p:sldId id="546" r:id="rId21"/>
+    <p:sldId id="545" r:id="rId22"/>
+    <p:sldId id="547" r:id="rId23"/>
+    <p:sldId id="523" r:id="rId24"/>
+    <p:sldId id="535" r:id="rId25"/>
+    <p:sldId id="538" r:id="rId26"/>
+    <p:sldId id="536" r:id="rId27"/>
+    <p:sldId id="537" r:id="rId28"/>
+    <p:sldId id="542" r:id="rId29"/>
+    <p:sldId id="524" r:id="rId30"/>
+    <p:sldId id="567" r:id="rId31"/>
+    <p:sldId id="572" r:id="rId32"/>
+    <p:sldId id="519" r:id="rId33"/>
+    <p:sldId id="521" r:id="rId34"/>
+    <p:sldId id="522" r:id="rId35"/>
+    <p:sldId id="512" r:id="rId36"/>
+    <p:sldId id="513" r:id="rId37"/>
+    <p:sldId id="343" r:id="rId38"/>
   </p:sldIdLst>
   <p:sldSz cx="9144000" cy="6858000" type="screen4x3"/>
   <p:notesSz cx="6858000" cy="9144000"/>
@@ -259,7 +262,7 @@
             <a:fld id="{50D0DBAB-D1C9-4D1B-A41F-EB0AC0278643}" type="datetimeFigureOut">
               <a:rPr lang="en-US" smtClean="0"/>
               <a:pPr/>
-              <a:t>6/11/2026</a:t>
+              <a:t>6/12/2026</a:t>
             </a:fld>
             <a:endParaRPr lang="en-US"/>
           </a:p>
@@ -421,7 +424,7 @@
             <a:fld id="{51300FB1-EAA8-41B6-84E0-C0BE923892D9}" type="datetimeFigureOut">
               <a:rPr lang="en-US" smtClean="0"/>
               <a:pPr/>
-              <a:t>6/11/2026</a:t>
+              <a:t>6/12/2026</a:t>
             </a:fld>
             <a:endParaRPr lang="en-US"/>
           </a:p>
@@ -878,7 +881,7 @@
               <a:pPr>
                 <a:defRPr/>
               </a:pPr>
-              <a:t>6/11/2026</a:t>
+              <a:t>6/12/2026</a:t>
             </a:fld>
             <a:endParaRPr lang="en-US"/>
           </a:p>
@@ -1070,7 +1073,7 @@
               <a:pPr>
                 <a:defRPr/>
               </a:pPr>
-              <a:t>6/11/2026</a:t>
+              <a:t>6/12/2026</a:t>
             </a:fld>
             <a:endParaRPr lang="en-US"/>
           </a:p>
@@ -1272,7 +1275,7 @@
               <a:pPr>
                 <a:defRPr/>
               </a:pPr>
-              <a:t>6/11/2026</a:t>
+              <a:t>6/12/2026</a:t>
             </a:fld>
             <a:endParaRPr lang="en-US"/>
           </a:p>
@@ -1464,7 +1467,7 @@
               <a:pPr>
                 <a:defRPr/>
               </a:pPr>
-              <a:t>6/11/2026</a:t>
+              <a:t>6/12/2026</a:t>
             </a:fld>
             <a:endParaRPr lang="en-US"/>
           </a:p>
@@ -1732,7 +1735,7 @@
               <a:pPr>
                 <a:defRPr/>
               </a:pPr>
-              <a:t>6/11/2026</a:t>
+              <a:t>6/12/2026</a:t>
             </a:fld>
             <a:endParaRPr lang="en-US"/>
           </a:p>
@@ -2042,7 +2045,7 @@
               <a:pPr>
                 <a:defRPr/>
               </a:pPr>
-              <a:t>6/11/2026</a:t>
+              <a:t>6/12/2026</a:t>
             </a:fld>
             <a:endParaRPr lang="en-US"/>
           </a:p>
@@ -2486,7 +2489,7 @@
               <a:pPr>
                 <a:defRPr/>
               </a:pPr>
-              <a:t>6/11/2026</a:t>
+              <a:t>6/12/2026</a:t>
             </a:fld>
             <a:endParaRPr lang="en-US"/>
           </a:p>
@@ -2626,7 +2629,7 @@
               <a:pPr>
                 <a:defRPr/>
               </a:pPr>
-              <a:t>6/11/2026</a:t>
+              <a:t>6/12/2026</a:t>
             </a:fld>
             <a:endParaRPr lang="en-US"/>
           </a:p>
@@ -2743,7 +2746,7 @@
               <a:pPr>
                 <a:defRPr/>
               </a:pPr>
-              <a:t>6/11/2026</a:t>
+              <a:t>6/12/2026</a:t>
             </a:fld>
             <a:endParaRPr lang="en-US"/>
           </a:p>
@@ -3042,7 +3045,7 @@
               <a:pPr>
                 <a:defRPr/>
               </a:pPr>
-              <a:t>6/11/2026</a:t>
+              <a:t>6/12/2026</a:t>
             </a:fld>
             <a:endParaRPr lang="en-US"/>
           </a:p>
@@ -3320,7 +3323,7 @@
               <a:pPr>
                 <a:defRPr/>
               </a:pPr>
-              <a:t>6/11/2026</a:t>
+              <a:t>6/12/2026</a:t>
             </a:fld>
             <a:endParaRPr lang="en-US"/>
           </a:p>
@@ -3568,7 +3571,7 @@
               <a:pPr>
                 <a:defRPr/>
               </a:pPr>
-              <a:t>6/11/2026</a:t>
+              <a:t>6/12/2026</a:t>
             </a:fld>
             <a:endParaRPr lang="en-US"/>
           </a:p>
@@ -4298,7 +4301,19 @@
             <a:pPr algn="l"/>
             <a:r>
               <a:rPr lang="en-US" dirty="0" smtClean="0"/>
-              <a:t>1. Install Warp</a:t>
+              <a:t>1. Install </a:t>
+            </a:r>
+            <a:r>
+              <a:rPr lang="en-US" dirty="0" err="1" smtClean="0"/>
+              <a:t>OpenCode</a:t>
+            </a:r>
+            <a:r>
+              <a:rPr lang="en-US" dirty="0" smtClean="0"/>
+              <a:t> on </a:t>
+            </a:r>
+            <a:r>
+              <a:rPr lang="en-US" dirty="0" err="1" smtClean="0"/>
+              <a:t>macOS</a:t>
             </a:r>
             <a:endParaRPr lang="en-US" dirty="0"/>
           </a:p>
@@ -4320,50 +4335,88 @@
           <a:lstStyle/>
           <a:p>
             <a:r>
-              <a:rPr lang="en-US" sz="2400" dirty="0" smtClean="0">
+              <a:rPr lang="en-US" sz="2200" dirty="0" smtClean="0">
                 <a:hlinkClick r:id="rId2"/>
               </a:rPr>
-              <a:t>https://www.warp.dev/pricing</a:t>
-            </a:r>
-            <a:endParaRPr lang="en-US" sz="2400" dirty="0" smtClean="0"/>
-          </a:p>
-          <a:p>
-            <a:endParaRPr lang="en-US" sz="2400" dirty="0"/>
-          </a:p>
-        </p:txBody>
-      </p:sp>
-      <p:pic>
-        <p:nvPicPr>
-          <p:cNvPr id="2050" name="Picture 2"/>
-          <p:cNvPicPr>
-            <a:picLocks noChangeAspect="1" noChangeArrowheads="1"/>
-          </p:cNvPicPr>
-          <p:nvPr/>
-        </p:nvPicPr>
-        <p:blipFill>
-          <a:blip r:embed="rId3" cstate="print"/>
-          <a:srcRect/>
-          <a:stretch>
-            <a:fillRect/>
-          </a:stretch>
-        </p:blipFill>
-        <p:spPr bwMode="auto">
-          <a:xfrm>
-            <a:off x="1371600" y="2438400"/>
-            <a:ext cx="6332220" cy="3700780"/>
-          </a:xfrm>
-          <a:prstGeom prst="rect">
-            <a:avLst/>
-          </a:prstGeom>
-          <a:noFill/>
-          <a:ln w="9525">
-            <a:noFill/>
-            <a:miter lim="800000"/>
-            <a:headEnd/>
-            <a:tailEnd/>
-          </a:ln>
-        </p:spPr>
-      </p:pic>
+              <a:t>https://opencode.ai</a:t>
+            </a:r>
+            <a:r>
+              <a:rPr lang="en-US" sz="2200" dirty="0" smtClean="0">
+                <a:hlinkClick r:id="rId2"/>
+              </a:rPr>
+              <a:t>/</a:t>
+            </a:r>
+            <a:endParaRPr lang="en-US" sz="2200" dirty="0" smtClean="0"/>
+          </a:p>
+          <a:p>
+            <a:r>
+              <a:rPr lang="en-US" sz="2200" dirty="0" smtClean="0"/>
+              <a:t>curl </a:t>
+            </a:r>
+            <a:r>
+              <a:rPr lang="en-US" sz="2200" dirty="0" smtClean="0"/>
+              <a:t>-</a:t>
+            </a:r>
+            <a:r>
+              <a:rPr lang="en-US" sz="2200" dirty="0" err="1" smtClean="0"/>
+              <a:t>fsSL</a:t>
+            </a:r>
+            <a:r>
+              <a:rPr lang="en-US" sz="2200" dirty="0" smtClean="0"/>
+              <a:t> https://opencode.ai/install | </a:t>
+            </a:r>
+            <a:r>
+              <a:rPr lang="en-US" sz="2200" dirty="0" smtClean="0"/>
+              <a:t>bash</a:t>
+            </a:r>
+          </a:p>
+          <a:p>
+            <a:r>
+              <a:rPr lang="en-US" sz="2200" dirty="0" err="1" smtClean="0"/>
+              <a:t>opencode</a:t>
+            </a:r>
+            <a:r>
+              <a:rPr lang="en-US" sz="2200" dirty="0" smtClean="0"/>
+              <a:t> --version</a:t>
+            </a:r>
+            <a:endParaRPr lang="en-US" sz="2200" dirty="0" smtClean="0"/>
+          </a:p>
+          <a:p>
+            <a:r>
+              <a:rPr lang="en-US" sz="2200" dirty="0" err="1" smtClean="0"/>
+              <a:t>nano</a:t>
+            </a:r>
+            <a:r>
+              <a:rPr lang="en-US" sz="2200" dirty="0" smtClean="0"/>
+              <a:t> ~/.</a:t>
+            </a:r>
+            <a:r>
+              <a:rPr lang="en-US" sz="2200" dirty="0" err="1" smtClean="0"/>
+              <a:t>config</a:t>
+            </a:r>
+            <a:r>
+              <a:rPr lang="en-US" sz="2200" dirty="0" smtClean="0"/>
+              <a:t>/</a:t>
+            </a:r>
+            <a:r>
+              <a:rPr lang="en-US" sz="2200" dirty="0" err="1" smtClean="0"/>
+              <a:t>opencode</a:t>
+            </a:r>
+            <a:r>
+              <a:rPr lang="en-US" sz="2200" dirty="0" smtClean="0"/>
+              <a:t>/</a:t>
+            </a:r>
+            <a:r>
+              <a:rPr lang="en-US" sz="2200" dirty="0" err="1" smtClean="0"/>
+              <a:t>opencode.json</a:t>
+            </a:r>
+            <a:endParaRPr lang="en-US" sz="2200" dirty="0" smtClean="0"/>
+          </a:p>
+          <a:p>
+            <a:endParaRPr lang="en-US" sz="2200" dirty="0" smtClean="0"/>
+          </a:p>
+        </p:txBody>
+      </p:sp>
     </p:spTree>
   </p:cSld>
   <p:clrMapOvr>
@@ -4407,7 +4460,19 @@
             <a:pPr algn="l"/>
             <a:r>
               <a:rPr lang="en-US" dirty="0" smtClean="0"/>
-              <a:t>2. Review Usage</a:t>
+              <a:t>1. Install </a:t>
+            </a:r>
+            <a:r>
+              <a:rPr lang="en-US" dirty="0" err="1" smtClean="0"/>
+              <a:t>OpenCode</a:t>
+            </a:r>
+            <a:r>
+              <a:rPr lang="en-US" dirty="0" smtClean="0"/>
+              <a:t> on </a:t>
+            </a:r>
+            <a:r>
+              <a:rPr lang="en-US" dirty="0" err="1" smtClean="0"/>
+              <a:t>macOS</a:t>
             </a:r>
             <a:endParaRPr lang="en-US" dirty="0"/>
           </a:p>
@@ -4429,45 +4494,88 @@
           <a:lstStyle/>
           <a:p>
             <a:r>
-              <a:rPr lang="en-US" sz="2400" dirty="0" smtClean="0"/>
-              <a:t>Settings &gt; Billing and usage &gt; Overview.</a:t>
-            </a:r>
-            <a:endParaRPr lang="en-US" sz="2400" dirty="0"/>
-          </a:p>
-        </p:txBody>
-      </p:sp>
-      <p:pic>
-        <p:nvPicPr>
-          <p:cNvPr id="1027" name="Picture 3"/>
-          <p:cNvPicPr>
-            <a:picLocks noChangeAspect="1" noChangeArrowheads="1"/>
-          </p:cNvPicPr>
-          <p:nvPr/>
-        </p:nvPicPr>
-        <p:blipFill>
-          <a:blip r:embed="rId2" cstate="print"/>
-          <a:srcRect/>
-          <a:stretch>
-            <a:fillRect/>
-          </a:stretch>
-        </p:blipFill>
-        <p:spPr bwMode="auto">
-          <a:xfrm>
-            <a:off x="762000" y="2514600"/>
-            <a:ext cx="7653020" cy="3048000"/>
-          </a:xfrm>
-          <a:prstGeom prst="rect">
-            <a:avLst/>
-          </a:prstGeom>
-          <a:noFill/>
-          <a:ln w="9525">
-            <a:noFill/>
-            <a:miter lim="800000"/>
-            <a:headEnd/>
-            <a:tailEnd/>
-          </a:ln>
-        </p:spPr>
-      </p:pic>
+              <a:rPr lang="en-US" sz="2200" dirty="0" smtClean="0">
+                <a:hlinkClick r:id="rId2"/>
+              </a:rPr>
+              <a:t>https://opencode.ai</a:t>
+            </a:r>
+            <a:r>
+              <a:rPr lang="en-US" sz="2200" dirty="0" smtClean="0">
+                <a:hlinkClick r:id="rId2"/>
+              </a:rPr>
+              <a:t>/</a:t>
+            </a:r>
+            <a:endParaRPr lang="en-US" sz="2200" dirty="0" smtClean="0"/>
+          </a:p>
+          <a:p>
+            <a:r>
+              <a:rPr lang="en-US" sz="2200" dirty="0" smtClean="0"/>
+              <a:t>curl </a:t>
+            </a:r>
+            <a:r>
+              <a:rPr lang="en-US" sz="2200" dirty="0" smtClean="0"/>
+              <a:t>-</a:t>
+            </a:r>
+            <a:r>
+              <a:rPr lang="en-US" sz="2200" dirty="0" err="1" smtClean="0"/>
+              <a:t>fsSL</a:t>
+            </a:r>
+            <a:r>
+              <a:rPr lang="en-US" sz="2200" dirty="0" smtClean="0"/>
+              <a:t> https://opencode.ai/install | </a:t>
+            </a:r>
+            <a:r>
+              <a:rPr lang="en-US" sz="2200" dirty="0" smtClean="0"/>
+              <a:t>bash</a:t>
+            </a:r>
+          </a:p>
+          <a:p>
+            <a:r>
+              <a:rPr lang="en-US" sz="2200" dirty="0" err="1" smtClean="0"/>
+              <a:t>opencode</a:t>
+            </a:r>
+            <a:r>
+              <a:rPr lang="en-US" sz="2200" dirty="0" smtClean="0"/>
+              <a:t> --version</a:t>
+            </a:r>
+            <a:endParaRPr lang="en-US" sz="2200" dirty="0" smtClean="0"/>
+          </a:p>
+          <a:p>
+            <a:r>
+              <a:rPr lang="en-US" sz="2200" dirty="0" err="1" smtClean="0"/>
+              <a:t>nano</a:t>
+            </a:r>
+            <a:r>
+              <a:rPr lang="en-US" sz="2200" dirty="0" smtClean="0"/>
+              <a:t> ~/.</a:t>
+            </a:r>
+            <a:r>
+              <a:rPr lang="en-US" sz="2200" dirty="0" err="1" smtClean="0"/>
+              <a:t>config</a:t>
+            </a:r>
+            <a:r>
+              <a:rPr lang="en-US" sz="2200" dirty="0" smtClean="0"/>
+              <a:t>/</a:t>
+            </a:r>
+            <a:r>
+              <a:rPr lang="en-US" sz="2200" dirty="0" err="1" smtClean="0"/>
+              <a:t>opencode</a:t>
+            </a:r>
+            <a:r>
+              <a:rPr lang="en-US" sz="2200" dirty="0" smtClean="0"/>
+              <a:t>/</a:t>
+            </a:r>
+            <a:r>
+              <a:rPr lang="en-US" sz="2200" dirty="0" err="1" smtClean="0"/>
+              <a:t>opencode.json</a:t>
+            </a:r>
+            <a:endParaRPr lang="en-US" sz="2200" dirty="0" smtClean="0"/>
+          </a:p>
+          <a:p>
+            <a:endParaRPr lang="en-US" sz="2200" dirty="0" smtClean="0"/>
+          </a:p>
+        </p:txBody>
+      </p:sp>
     </p:spTree>
   </p:cSld>
   <p:clrMapOvr>
@@ -4562,11 +4670,7 @@
             <a:pPr algn="l"/>
             <a:r>
               <a:rPr lang="en-US" dirty="0" smtClean="0"/>
-              <a:t>1. Install </a:t>
-            </a:r>
-            <a:r>
-              <a:rPr lang="en-US" dirty="0" err="1" smtClean="0"/>
-              <a:t>Kiro</a:t>
+              <a:t>1. Install Warp</a:t>
             </a:r>
             <a:endParaRPr lang="en-US" dirty="0"/>
           </a:p>
@@ -4591,34 +4695,18 @@
               <a:rPr lang="en-US" sz="2400" dirty="0" smtClean="0">
                 <a:hlinkClick r:id="rId2"/>
               </a:rPr>
-              <a:t>https://kiro.dev/</a:t>
+              <a:t>https://www.warp.dev/pricing</a:t>
             </a:r>
             <a:endParaRPr lang="en-US" sz="2400" dirty="0" smtClean="0"/>
           </a:p>
           <a:p>
-            <a:r>
-              <a:rPr lang="en-US" sz="2400" dirty="0" err="1" smtClean="0"/>
-              <a:t>Kiro</a:t>
-            </a:r>
-            <a:r>
-              <a:rPr lang="en-US" sz="2400" dirty="0" smtClean="0"/>
-              <a:t> is an </a:t>
-            </a:r>
-            <a:r>
-              <a:rPr lang="en-US" sz="2400" dirty="0" err="1" smtClean="0"/>
-              <a:t>agentic</a:t>
-            </a:r>
-            <a:r>
-              <a:rPr lang="en-US" sz="2400" dirty="0" smtClean="0"/>
-              <a:t> AI integrated development environment that converts natural-language specifications into structured plans, code, documentation, and tests using autonomous AI agents. </a:t>
-            </a:r>
             <a:endParaRPr lang="en-US" sz="2400" dirty="0"/>
           </a:p>
         </p:txBody>
       </p:sp>
       <p:pic>
         <p:nvPicPr>
-          <p:cNvPr id="1026" name="Picture 2"/>
+          <p:cNvPr id="2050" name="Picture 2"/>
           <p:cNvPicPr>
             <a:picLocks noChangeAspect="1" noChangeArrowheads="1"/>
           </p:cNvPicPr>
@@ -4633,8 +4721,8 @@
         </p:blipFill>
         <p:spPr bwMode="auto">
           <a:xfrm>
-            <a:off x="3048000" y="3581400"/>
-            <a:ext cx="3419475" cy="2636520"/>
+            <a:off x="1371600" y="2438400"/>
+            <a:ext cx="6332220" cy="3700780"/>
           </a:xfrm>
           <a:prstGeom prst="rect">
             <a:avLst/>
@@ -4657,6 +4745,110 @@
 </file>
 
 <file path=ppt/slides/slide15.xml><?xml version="1.0" encoding="utf-8"?>
+<p:sld xmlns:a="http://schemas.openxmlformats.org/drawingml/2006/main" xmlns:r="http://schemas.openxmlformats.org/officeDocument/2006/relationships" xmlns:p="http://schemas.openxmlformats.org/presentationml/2006/main">
+  <p:cSld>
+    <p:spTree>
+      <p:nvGrpSpPr>
+        <p:cNvPr id="1" name=""/>
+        <p:cNvGrpSpPr/>
+        <p:nvPr/>
+      </p:nvGrpSpPr>
+      <p:grpSpPr>
+        <a:xfrm>
+          <a:off x="0" y="0"/>
+          <a:ext cx="0" cy="0"/>
+          <a:chOff x="0" y="0"/>
+          <a:chExt cx="0" cy="0"/>
+        </a:xfrm>
+      </p:grpSpPr>
+      <p:sp>
+        <p:nvSpPr>
+          <p:cNvPr id="2" name="Title 1"/>
+          <p:cNvSpPr>
+            <a:spLocks noGrp="1"/>
+          </p:cNvSpPr>
+          <p:nvPr>
+            <p:ph type="title"/>
+          </p:nvPr>
+        </p:nvSpPr>
+        <p:spPr/>
+        <p:txBody>
+          <a:bodyPr/>
+          <a:lstStyle/>
+          <a:p>
+            <a:pPr algn="l"/>
+            <a:r>
+              <a:rPr lang="en-US" dirty="0" smtClean="0"/>
+              <a:t>2. Review Usage</a:t>
+            </a:r>
+            <a:endParaRPr lang="en-US" dirty="0"/>
+          </a:p>
+        </p:txBody>
+      </p:sp>
+      <p:sp>
+        <p:nvSpPr>
+          <p:cNvPr id="3" name="Content Placeholder 2"/>
+          <p:cNvSpPr>
+            <a:spLocks noGrp="1"/>
+          </p:cNvSpPr>
+          <p:nvPr>
+            <p:ph idx="1"/>
+          </p:nvPr>
+        </p:nvSpPr>
+        <p:spPr/>
+        <p:txBody>
+          <a:bodyPr/>
+          <a:lstStyle/>
+          <a:p>
+            <a:r>
+              <a:rPr lang="en-US" sz="2400" dirty="0" smtClean="0"/>
+              <a:t>Settings &gt; Billing and usage &gt; Overview.</a:t>
+            </a:r>
+            <a:endParaRPr lang="en-US" sz="2400" dirty="0"/>
+          </a:p>
+        </p:txBody>
+      </p:sp>
+      <p:pic>
+        <p:nvPicPr>
+          <p:cNvPr id="1027" name="Picture 3"/>
+          <p:cNvPicPr>
+            <a:picLocks noChangeAspect="1" noChangeArrowheads="1"/>
+          </p:cNvPicPr>
+          <p:nvPr/>
+        </p:nvPicPr>
+        <p:blipFill>
+          <a:blip r:embed="rId2" cstate="print"/>
+          <a:srcRect/>
+          <a:stretch>
+            <a:fillRect/>
+          </a:stretch>
+        </p:blipFill>
+        <p:spPr bwMode="auto">
+          <a:xfrm>
+            <a:off x="762000" y="2514600"/>
+            <a:ext cx="7653020" cy="3048000"/>
+          </a:xfrm>
+          <a:prstGeom prst="rect">
+            <a:avLst/>
+          </a:prstGeom>
+          <a:noFill/>
+          <a:ln w="9525">
+            <a:noFill/>
+            <a:miter lim="800000"/>
+            <a:headEnd/>
+            <a:tailEnd/>
+          </a:ln>
+        </p:spPr>
+      </p:pic>
+    </p:spTree>
+  </p:cSld>
+  <p:clrMapOvr>
+    <a:masterClrMapping/>
+  </p:clrMapOvr>
+</p:sld>
+</file>
+
+<file path=ppt/slides/slide16.xml><?xml version="1.0" encoding="utf-8"?>
 <p:sld xmlns:a="http://schemas.openxmlformats.org/drawingml/2006/main" xmlns:r="http://schemas.openxmlformats.org/officeDocument/2006/relationships" xmlns:p="http://schemas.openxmlformats.org/presentationml/2006/main">
   <p:cSld>
     <p:spTree>
@@ -4707,115 +4899,6 @@
 </p:sld>
 </file>
 
-<file path=ppt/slides/slide16.xml><?xml version="1.0" encoding="utf-8"?>
-<p:sld xmlns:a="http://schemas.openxmlformats.org/drawingml/2006/main" xmlns:r="http://schemas.openxmlformats.org/officeDocument/2006/relationships" xmlns:p="http://schemas.openxmlformats.org/presentationml/2006/main">
-  <p:cSld>
-    <p:spTree>
-      <p:nvGrpSpPr>
-        <p:cNvPr id="1" name=""/>
-        <p:cNvGrpSpPr/>
-        <p:nvPr/>
-      </p:nvGrpSpPr>
-      <p:grpSpPr>
-        <a:xfrm>
-          <a:off x="0" y="0"/>
-          <a:ext cx="0" cy="0"/>
-          <a:chOff x="0" y="0"/>
-          <a:chExt cx="0" cy="0"/>
-        </a:xfrm>
-      </p:grpSpPr>
-      <p:sp>
-        <p:nvSpPr>
-          <p:cNvPr id="2" name="Title 1"/>
-          <p:cNvSpPr>
-            <a:spLocks noGrp="1"/>
-          </p:cNvSpPr>
-          <p:nvPr>
-            <p:ph type="title"/>
-          </p:nvPr>
-        </p:nvSpPr>
-        <p:spPr/>
-        <p:txBody>
-          <a:bodyPr/>
-          <a:lstStyle/>
-          <a:p>
-            <a:pPr algn="l"/>
-            <a:r>
-              <a:rPr lang="en-US" dirty="0" smtClean="0"/>
-              <a:t>1. Create a Prototype</a:t>
-            </a:r>
-            <a:endParaRPr lang="en-US" dirty="0"/>
-          </a:p>
-        </p:txBody>
-      </p:sp>
-      <p:sp>
-        <p:nvSpPr>
-          <p:cNvPr id="3" name="Content Placeholder 2"/>
-          <p:cNvSpPr>
-            <a:spLocks noGrp="1"/>
-          </p:cNvSpPr>
-          <p:nvPr>
-            <p:ph idx="1"/>
-          </p:nvPr>
-        </p:nvSpPr>
-        <p:spPr/>
-        <p:txBody>
-          <a:bodyPr/>
-          <a:lstStyle/>
-          <a:p>
-            <a:r>
-              <a:rPr lang="en-US" dirty="0" smtClean="0">
-                <a:hlinkClick r:id="rId2"/>
-              </a:rPr>
-              <a:t>https://lovable.dev/</a:t>
-            </a:r>
-            <a:endParaRPr lang="en-US" dirty="0" smtClean="0"/>
-          </a:p>
-          <a:p>
-            <a:endParaRPr lang="en-US" dirty="0"/>
-          </a:p>
-        </p:txBody>
-      </p:sp>
-      <p:pic>
-        <p:nvPicPr>
-          <p:cNvPr id="3074" name="Picture 2"/>
-          <p:cNvPicPr>
-            <a:picLocks noChangeAspect="1" noChangeArrowheads="1"/>
-          </p:cNvPicPr>
-          <p:nvPr/>
-        </p:nvPicPr>
-        <p:blipFill>
-          <a:blip r:embed="rId3" cstate="print"/>
-          <a:srcRect/>
-          <a:stretch>
-            <a:fillRect/>
-          </a:stretch>
-        </p:blipFill>
-        <p:spPr bwMode="auto">
-          <a:xfrm>
-            <a:off x="990600" y="2672715"/>
-            <a:ext cx="7225665" cy="3347085"/>
-          </a:xfrm>
-          <a:prstGeom prst="rect">
-            <a:avLst/>
-          </a:prstGeom>
-          <a:noFill/>
-          <a:ln w="9525">
-            <a:noFill/>
-            <a:miter lim="800000"/>
-            <a:headEnd/>
-            <a:tailEnd/>
-          </a:ln>
-        </p:spPr>
-      </p:pic>
-    </p:spTree>
-  </p:cSld>
-  <p:clrMapOvr>
-    <a:masterClrMapping/>
-  </p:clrMapOvr>
-</p:sld>
-</file>
-
 <file path=ppt/slides/slide17.xml><?xml version="1.0" encoding="utf-8"?>
 <p:sld xmlns:a="http://schemas.openxmlformats.org/drawingml/2006/main" xmlns:r="http://schemas.openxmlformats.org/officeDocument/2006/relationships" xmlns:p="http://schemas.openxmlformats.org/presentationml/2006/main">
   <p:cSld>
@@ -4851,22 +4934,70 @@
             <a:pPr algn="l"/>
             <a:r>
               <a:rPr lang="en-US" dirty="0" smtClean="0"/>
-              <a:t>2. Enable Lovable Cloud</a:t>
+              <a:t>1. Install </a:t>
+            </a:r>
+            <a:r>
+              <a:rPr lang="en-US" dirty="0" err="1" smtClean="0"/>
+              <a:t>Kiro</a:t>
             </a:r>
             <a:endParaRPr lang="en-US" dirty="0"/>
+          </a:p>
+        </p:txBody>
+      </p:sp>
+      <p:sp>
+        <p:nvSpPr>
+          <p:cNvPr id="3" name="Content Placeholder 2"/>
+          <p:cNvSpPr>
+            <a:spLocks noGrp="1"/>
+          </p:cNvSpPr>
+          <p:nvPr>
+            <p:ph idx="1"/>
+          </p:nvPr>
+        </p:nvSpPr>
+        <p:spPr/>
+        <p:txBody>
+          <a:bodyPr/>
+          <a:lstStyle/>
+          <a:p>
+            <a:r>
+              <a:rPr lang="en-US" sz="2400" dirty="0" smtClean="0">
+                <a:hlinkClick r:id="rId2"/>
+              </a:rPr>
+              <a:t>https://kiro.dev/</a:t>
+            </a:r>
+            <a:endParaRPr lang="en-US" sz="2400" dirty="0" smtClean="0"/>
+          </a:p>
+          <a:p>
+            <a:r>
+              <a:rPr lang="en-US" sz="2400" dirty="0" err="1" smtClean="0"/>
+              <a:t>Kiro</a:t>
+            </a:r>
+            <a:r>
+              <a:rPr lang="en-US" sz="2400" dirty="0" smtClean="0"/>
+              <a:t> is an </a:t>
+            </a:r>
+            <a:r>
+              <a:rPr lang="en-US" sz="2400" dirty="0" err="1" smtClean="0"/>
+              <a:t>agentic</a:t>
+            </a:r>
+            <a:r>
+              <a:rPr lang="en-US" sz="2400" dirty="0" smtClean="0"/>
+              <a:t> AI integrated development environment that converts natural-language specifications into structured plans, code, documentation, and tests using autonomous AI agents. </a:t>
+            </a:r>
+            <a:endParaRPr lang="en-US" sz="2400" dirty="0"/>
           </a:p>
         </p:txBody>
       </p:sp>
       <p:pic>
         <p:nvPicPr>
-          <p:cNvPr id="4098" name="Picture 2"/>
+          <p:cNvPr id="1026" name="Picture 2"/>
           <p:cNvPicPr>
             <a:picLocks noChangeAspect="1" noChangeArrowheads="1"/>
           </p:cNvPicPr>
           <p:nvPr/>
         </p:nvPicPr>
         <p:blipFill>
-          <a:blip r:embed="rId2" cstate="print"/>
+          <a:blip r:embed="rId3" cstate="print"/>
           <a:srcRect/>
           <a:stretch>
             <a:fillRect/>
@@ -4874,8 +5005,8 @@
         </p:blipFill>
         <p:spPr bwMode="auto">
           <a:xfrm>
-            <a:off x="1187450" y="2212975"/>
-            <a:ext cx="6769100" cy="2968625"/>
+            <a:off x="3048000" y="3581400"/>
+            <a:ext cx="3419475" cy="2636520"/>
           </a:xfrm>
           <a:prstGeom prst="rect">
             <a:avLst/>
@@ -4914,59 +5045,9 @@
           <a:chExt cx="0" cy="0"/>
         </a:xfrm>
       </p:grpSpPr>
-      <p:sp>
-        <p:nvSpPr>
-          <p:cNvPr id="2" name="Title 1"/>
-          <p:cNvSpPr>
-            <a:spLocks noGrp="1"/>
-          </p:cNvSpPr>
-          <p:nvPr>
-            <p:ph type="title"/>
-          </p:nvPr>
-        </p:nvSpPr>
-        <p:spPr/>
-        <p:txBody>
-          <a:bodyPr/>
-          <a:lstStyle/>
-          <a:p>
-            <a:pPr algn="l"/>
-            <a:r>
-              <a:rPr lang="en-US" dirty="0" smtClean="0"/>
-              <a:t>3. Implement Feature</a:t>
-            </a:r>
-            <a:endParaRPr lang="en-US" dirty="0"/>
-          </a:p>
-        </p:txBody>
-      </p:sp>
-      <p:sp>
-        <p:nvSpPr>
-          <p:cNvPr id="3" name="Content Placeholder 2"/>
-          <p:cNvSpPr>
-            <a:spLocks noGrp="1"/>
-          </p:cNvSpPr>
-          <p:nvPr>
-            <p:ph idx="1"/>
-          </p:nvPr>
-        </p:nvSpPr>
-        <p:spPr/>
-        <p:txBody>
-          <a:bodyPr/>
-          <a:lstStyle/>
-          <a:p>
-            <a:r>
-              <a:rPr lang="en-US" dirty="0" smtClean="0"/>
-              <a:t>Implement Add Material</a:t>
-            </a:r>
-            <a:br>
-              <a:rPr lang="en-US" dirty="0" smtClean="0"/>
-            </a:br>
-            <a:endParaRPr lang="en-US" dirty="0"/>
-          </a:p>
-        </p:txBody>
-      </p:sp>
       <p:pic>
         <p:nvPicPr>
-          <p:cNvPr id="5125" name="Picture 5"/>
+          <p:cNvPr id="4" name="Picture 2" descr="https://lh3.ggpht.com/1IfZLL2QDSjZ0wS7sUhaMlsAOS8BBzdR3wZ1WawgRn7KZAM8nEVZYMOUM-lqQb0ikIzp=w300"/>
           <p:cNvPicPr>
             <a:picLocks noChangeAspect="1" noChangeArrowheads="1"/>
           </p:cNvPicPr>
@@ -4981,19 +5062,13 @@
         </p:blipFill>
         <p:spPr bwMode="auto">
           <a:xfrm>
-            <a:off x="696913" y="2413000"/>
-            <a:ext cx="7750175" cy="3606800"/>
+            <a:off x="3276600" y="1905000"/>
+            <a:ext cx="2857500" cy="2857500"/>
           </a:xfrm>
           <a:prstGeom prst="rect">
             <a:avLst/>
           </a:prstGeom>
           <a:noFill/>
-          <a:ln w="9525">
-            <a:noFill/>
-            <a:miter lim="800000"/>
-            <a:headEnd/>
-            <a:tailEnd/>
-          </a:ln>
         </p:spPr>
       </p:pic>
     </p:spTree>
@@ -5039,22 +5114,50 @@
             <a:pPr algn="l"/>
             <a:r>
               <a:rPr lang="en-US" dirty="0" smtClean="0"/>
-              <a:t>4. Test the Feature</a:t>
-            </a:r>
+              <a:t>1. Create a Prototype</a:t>
+            </a:r>
+            <a:endParaRPr lang="en-US" dirty="0"/>
+          </a:p>
+        </p:txBody>
+      </p:sp>
+      <p:sp>
+        <p:nvSpPr>
+          <p:cNvPr id="3" name="Content Placeholder 2"/>
+          <p:cNvSpPr>
+            <a:spLocks noGrp="1"/>
+          </p:cNvSpPr>
+          <p:nvPr>
+            <p:ph idx="1"/>
+          </p:nvPr>
+        </p:nvSpPr>
+        <p:spPr/>
+        <p:txBody>
+          <a:bodyPr/>
+          <a:lstStyle/>
+          <a:p>
+            <a:r>
+              <a:rPr lang="en-US" dirty="0" smtClean="0">
+                <a:hlinkClick r:id="rId2"/>
+              </a:rPr>
+              <a:t>https://lovable.dev/</a:t>
+            </a:r>
+            <a:endParaRPr lang="en-US" dirty="0" smtClean="0"/>
+          </a:p>
+          <a:p>
             <a:endParaRPr lang="en-US" dirty="0"/>
           </a:p>
         </p:txBody>
       </p:sp>
       <p:pic>
         <p:nvPicPr>
-          <p:cNvPr id="6146" name="Picture 2"/>
+          <p:cNvPr id="3074" name="Picture 2"/>
           <p:cNvPicPr>
             <a:picLocks noChangeAspect="1" noChangeArrowheads="1"/>
           </p:cNvPicPr>
           <p:nvPr/>
         </p:nvPicPr>
         <p:blipFill>
-          <a:blip r:embed="rId2" cstate="print"/>
+          <a:blip r:embed="rId3" cstate="print"/>
           <a:srcRect/>
           <a:stretch>
             <a:fillRect/>
@@ -5062,8 +5165,8 @@
         </p:blipFill>
         <p:spPr bwMode="auto">
           <a:xfrm>
-            <a:off x="731838" y="2146300"/>
-            <a:ext cx="7680325" cy="3721100"/>
+            <a:off x="990600" y="2672715"/>
+            <a:ext cx="7225665" cy="3347085"/>
           </a:xfrm>
           <a:prstGeom prst="rect">
             <a:avLst/>
@@ -5218,9 +5321,33 @@
           <a:chExt cx="0" cy="0"/>
         </a:xfrm>
       </p:grpSpPr>
+      <p:sp>
+        <p:nvSpPr>
+          <p:cNvPr id="2" name="Title 1"/>
+          <p:cNvSpPr>
+            <a:spLocks noGrp="1"/>
+          </p:cNvSpPr>
+          <p:nvPr>
+            <p:ph type="title"/>
+          </p:nvPr>
+        </p:nvSpPr>
+        <p:spPr/>
+        <p:txBody>
+          <a:bodyPr/>
+          <a:lstStyle/>
+          <a:p>
+            <a:pPr algn="l"/>
+            <a:r>
+              <a:rPr lang="en-US" dirty="0" smtClean="0"/>
+              <a:t>2. Enable Lovable Cloud</a:t>
+            </a:r>
+            <a:endParaRPr lang="en-US" dirty="0"/>
+          </a:p>
+        </p:txBody>
+      </p:sp>
       <p:pic>
         <p:nvPicPr>
-          <p:cNvPr id="4" name="Picture 2" descr="https://lh3.ggpht.com/1IfZLL2QDSjZ0wS7sUhaMlsAOS8BBzdR3wZ1WawgRn7KZAM8nEVZYMOUM-lqQb0ikIzp=w300"/>
+          <p:cNvPr id="4098" name="Picture 2"/>
           <p:cNvPicPr>
             <a:picLocks noChangeAspect="1" noChangeArrowheads="1"/>
           </p:cNvPicPr>
@@ -5235,13 +5362,19 @@
         </p:blipFill>
         <p:spPr bwMode="auto">
           <a:xfrm>
-            <a:off x="3276600" y="1905000"/>
-            <a:ext cx="2857500" cy="2857500"/>
+            <a:off x="1187450" y="2212975"/>
+            <a:ext cx="6769100" cy="2968625"/>
           </a:xfrm>
           <a:prstGeom prst="rect">
             <a:avLst/>
           </a:prstGeom>
           <a:noFill/>
+          <a:ln w="9525">
+            <a:noFill/>
+            <a:miter lim="800000"/>
+            <a:headEnd/>
+            <a:tailEnd/>
+          </a:ln>
         </p:spPr>
       </p:pic>
     </p:spTree>
@@ -5287,7 +5420,7 @@
             <a:pPr algn="l"/>
             <a:r>
               <a:rPr lang="en-US" dirty="0" smtClean="0"/>
-              <a:t>1. Create App with Emergent</a:t>
+              <a:t>3. Implement Feature</a:t>
             </a:r>
             <a:endParaRPr lang="en-US" dirty="0"/>
           </a:p>
@@ -5309,28 +5442,26 @@
           <a:lstStyle/>
           <a:p>
             <a:r>
-              <a:rPr lang="en-US" dirty="0" smtClean="0">
-                <a:hlinkClick r:id="rId2"/>
-              </a:rPr>
-              <a:t>https://app.emergent.sh</a:t>
-            </a:r>
-            <a:endParaRPr lang="en-US" dirty="0" smtClean="0"/>
-          </a:p>
-          <a:p>
+              <a:rPr lang="en-US" dirty="0" smtClean="0"/>
+              <a:t>Implement Add Material</a:t>
+            </a:r>
+            <a:br>
+              <a:rPr lang="en-US" dirty="0" smtClean="0"/>
+            </a:br>
             <a:endParaRPr lang="en-US" dirty="0"/>
           </a:p>
         </p:txBody>
       </p:sp>
       <p:pic>
         <p:nvPicPr>
-          <p:cNvPr id="1026" name="Picture 2"/>
+          <p:cNvPr id="5125" name="Picture 5"/>
           <p:cNvPicPr>
             <a:picLocks noChangeAspect="1" noChangeArrowheads="1"/>
           </p:cNvPicPr>
           <p:nvPr/>
         </p:nvPicPr>
         <p:blipFill>
-          <a:blip r:embed="rId3" cstate="print"/>
+          <a:blip r:embed="rId2" cstate="print"/>
           <a:srcRect/>
           <a:stretch>
             <a:fillRect/>
@@ -5338,8 +5469,8 @@
         </p:blipFill>
         <p:spPr bwMode="auto">
           <a:xfrm>
-            <a:off x="914400" y="2743200"/>
-            <a:ext cx="7218081" cy="3331694"/>
+            <a:off x="696913" y="2413000"/>
+            <a:ext cx="7750175" cy="3606800"/>
           </a:xfrm>
           <a:prstGeom prst="rect">
             <a:avLst/>
@@ -5393,171 +5524,10 @@
           <a:bodyPr/>
           <a:lstStyle/>
           <a:p>
+            <a:pPr algn="l"/>
             <a:r>
               <a:rPr lang="en-US" dirty="0" smtClean="0"/>
-              <a:t>The Two Prompts</a:t>
-            </a:r>
-            <a:endParaRPr lang="en-US" dirty="0"/>
-          </a:p>
-        </p:txBody>
-      </p:sp>
-      <p:sp>
-        <p:nvSpPr>
-          <p:cNvPr id="3" name="Content Placeholder 2"/>
-          <p:cNvSpPr>
-            <a:spLocks noGrp="1"/>
-          </p:cNvSpPr>
-          <p:nvPr>
-            <p:ph idx="1"/>
-          </p:nvPr>
-        </p:nvSpPr>
-        <p:spPr/>
-        <p:txBody>
-          <a:bodyPr/>
-          <a:lstStyle/>
-          <a:p>
-            <a:r>
-              <a:rPr lang="en-US" sz="1200" b="1" dirty="0" smtClean="0"/>
-              <a:t>Create a prototype for an Inventory Management System with the following PRD:</a:t>
-            </a:r>
-          </a:p>
-          <a:p>
-            <a:endParaRPr lang="en-US" sz="1200" dirty="0" smtClean="0"/>
-          </a:p>
-          <a:p>
-            <a:r>
-              <a:rPr lang="en-US" sz="1200" dirty="0" smtClean="0"/>
-              <a:t>Inventory Management System</a:t>
-            </a:r>
-          </a:p>
-          <a:p>
-            <a:endParaRPr lang="en-US" sz="1200" dirty="0" smtClean="0"/>
-          </a:p>
-          <a:p>
-            <a:r>
-              <a:rPr lang="en-US" sz="1200" dirty="0" smtClean="0"/>
-              <a:t>A comprehensive, FDA-compliant lot tracking inventory system for pharmaceutical and laboratory environments.</a:t>
-            </a:r>
-          </a:p>
-          <a:p>
-            <a:endParaRPr lang="en-US" sz="1200" dirty="0" smtClean="0"/>
-          </a:p>
-          <a:p>
-            <a:r>
-              <a:rPr lang="en-US" sz="1200" dirty="0" smtClean="0"/>
-              <a:t>## 🚀 Features</a:t>
-            </a:r>
-          </a:p>
-          <a:p>
-            <a:endParaRPr lang="en-US" sz="1200" dirty="0" smtClean="0"/>
-          </a:p>
-          <a:p>
-            <a:r>
-              <a:rPr lang="en-US" sz="1200" dirty="0" smtClean="0"/>
-              <a:t>### Core Functionality</a:t>
-            </a:r>
-          </a:p>
-          <a:p>
-            <a:r>
-              <a:rPr lang="en-US" sz="1200" dirty="0" smtClean="0"/>
-              <a:t>- **Material Master Data Management** - Centralized material information with TG part numbers</a:t>
-            </a:r>
-          </a:p>
-          <a:p>
-            <a:r>
-              <a:rPr lang="en-US" sz="1200" dirty="0" smtClean="0"/>
-              <a:t>- **Lot Tracking &amp; Control** - Complete traceability from receipt to usage</a:t>
-            </a:r>
-          </a:p>
-          <a:p>
-            <a:r>
-              <a:rPr lang="en-US" sz="1200" dirty="0" smtClean="0"/>
-              <a:t>- **Production Batch Management** - Track production batches with full genealogy</a:t>
-            </a:r>
-          </a:p>
-          <a:p>
-            <a:r>
-              <a:rPr lang="en-US" sz="1200" dirty="0" smtClean="0"/>
-              <a:t>- **Quality Control Integration** - QC testing and acceptance workflows</a:t>
-            </a:r>
-          </a:p>
-          <a:p>
-            <a:r>
-              <a:rPr lang="en-US" sz="1200" dirty="0" smtClean="0"/>
-              <a:t>- **Label Generation &amp; Printing** - Barcode labels for materials and samples</a:t>
-            </a:r>
-          </a:p>
-          <a:p>
-            <a:r>
-              <a:rPr lang="en-US" sz="1200" dirty="0" smtClean="0"/>
-              <a:t>- **Comprehensive Reporting** - Advanced reporting with caching and scheduling</a:t>
-            </a:r>
-          </a:p>
-          <a:p>
-            <a:endParaRPr lang="en-US" sz="1200" dirty="0" smtClean="0"/>
-          </a:p>
-          <a:p>
-            <a:r>
-              <a:rPr lang="en-US" sz="1200" dirty="0" smtClean="0"/>
-              <a:t>----------</a:t>
-            </a:r>
-          </a:p>
-          <a:p>
-            <a:endParaRPr lang="en-US" sz="1200" dirty="0" smtClean="0"/>
-          </a:p>
-          <a:p>
-            <a:r>
-              <a:rPr lang="en-US" sz="1200" b="1" dirty="0" smtClean="0"/>
-              <a:t>Choose the default options for all the questions.</a:t>
-            </a:r>
-            <a:endParaRPr lang="en-US" sz="1200" b="1" dirty="0"/>
-          </a:p>
-        </p:txBody>
-      </p:sp>
-    </p:spTree>
-  </p:cSld>
-  <p:clrMapOvr>
-    <a:masterClrMapping/>
-  </p:clrMapOvr>
-</p:sld>
-</file>
-
-<file path=ppt/slides/slide23.xml><?xml version="1.0" encoding="utf-8"?>
-<p:sld xmlns:a="http://schemas.openxmlformats.org/drawingml/2006/main" xmlns:r="http://schemas.openxmlformats.org/officeDocument/2006/relationships" xmlns:p="http://schemas.openxmlformats.org/presentationml/2006/main">
-  <p:cSld>
-    <p:spTree>
-      <p:nvGrpSpPr>
-        <p:cNvPr id="1" name=""/>
-        <p:cNvGrpSpPr/>
-        <p:nvPr/>
-      </p:nvGrpSpPr>
-      <p:grpSpPr>
-        <a:xfrm>
-          <a:off x="0" y="0"/>
-          <a:ext cx="0" cy="0"/>
-          <a:chOff x="0" y="0"/>
-          <a:chExt cx="0" cy="0"/>
-        </a:xfrm>
-      </p:grpSpPr>
-      <p:sp>
-        <p:nvSpPr>
-          <p:cNvPr id="2" name="Title 1"/>
-          <p:cNvSpPr>
-            <a:spLocks noGrp="1"/>
-          </p:cNvSpPr>
-          <p:nvPr>
-            <p:ph type="title"/>
-          </p:nvPr>
-        </p:nvSpPr>
-        <p:spPr/>
-        <p:txBody>
-          <a:bodyPr/>
-          <a:lstStyle/>
-          <a:p>
-            <a:pPr algn="l"/>
-            <a:r>
-              <a:rPr lang="en-US" dirty="0" smtClean="0"/>
-              <a:t>2. Preview or Deploy the App</a:t>
+              <a:t>4. Test the Feature</a:t>
             </a:r>
             <a:endParaRPr lang="en-US" dirty="0"/>
           </a:p>
@@ -5565,7 +5535,7 @@
       </p:sp>
       <p:pic>
         <p:nvPicPr>
-          <p:cNvPr id="2050" name="Picture 2"/>
+          <p:cNvPr id="6146" name="Picture 2"/>
           <p:cNvPicPr>
             <a:picLocks noChangeAspect="1" noChangeArrowheads="1"/>
           </p:cNvPicPr>
@@ -5580,8 +5550,8 @@
         </p:blipFill>
         <p:spPr bwMode="auto">
           <a:xfrm>
-            <a:off x="762000" y="2667000"/>
-            <a:ext cx="7525043" cy="2876342"/>
+            <a:off x="731838" y="2146300"/>
+            <a:ext cx="7680325" cy="3721100"/>
           </a:xfrm>
           <a:prstGeom prst="rect">
             <a:avLst/>
@@ -5603,88 +5573,7 @@
 </p:sld>
 </file>
 
-<file path=ppt/slides/slide24.xml><?xml version="1.0" encoding="utf-8"?>
-<p:sld xmlns:a="http://schemas.openxmlformats.org/drawingml/2006/main" xmlns:r="http://schemas.openxmlformats.org/officeDocument/2006/relationships" xmlns:p="http://schemas.openxmlformats.org/presentationml/2006/main">
-  <p:cSld>
-    <p:spTree>
-      <p:nvGrpSpPr>
-        <p:cNvPr id="1" name=""/>
-        <p:cNvGrpSpPr/>
-        <p:nvPr/>
-      </p:nvGrpSpPr>
-      <p:grpSpPr>
-        <a:xfrm>
-          <a:off x="0" y="0"/>
-          <a:ext cx="0" cy="0"/>
-          <a:chOff x="0" y="0"/>
-          <a:chExt cx="0" cy="0"/>
-        </a:xfrm>
-      </p:grpSpPr>
-      <p:sp>
-        <p:nvSpPr>
-          <p:cNvPr id="2" name="Title 1"/>
-          <p:cNvSpPr>
-            <a:spLocks noGrp="1"/>
-          </p:cNvSpPr>
-          <p:nvPr>
-            <p:ph type="title"/>
-          </p:nvPr>
-        </p:nvSpPr>
-        <p:spPr/>
-        <p:txBody>
-          <a:bodyPr/>
-          <a:lstStyle/>
-          <a:p>
-            <a:pPr algn="l"/>
-            <a:r>
-              <a:rPr lang="en-US" dirty="0" smtClean="0"/>
-              <a:t>3. Review the App Features</a:t>
-            </a:r>
-            <a:endParaRPr lang="en-US" dirty="0"/>
-          </a:p>
-        </p:txBody>
-      </p:sp>
-      <p:pic>
-        <p:nvPicPr>
-          <p:cNvPr id="3074" name="Picture 2"/>
-          <p:cNvPicPr>
-            <a:picLocks noChangeAspect="1" noChangeArrowheads="1"/>
-          </p:cNvPicPr>
-          <p:nvPr/>
-        </p:nvPicPr>
-        <p:blipFill>
-          <a:blip r:embed="rId2" cstate="print"/>
-          <a:srcRect/>
-          <a:stretch>
-            <a:fillRect/>
-          </a:stretch>
-        </p:blipFill>
-        <p:spPr bwMode="auto">
-          <a:xfrm>
-            <a:off x="933450" y="1898650"/>
-            <a:ext cx="7277100" cy="3740150"/>
-          </a:xfrm>
-          <a:prstGeom prst="rect">
-            <a:avLst/>
-          </a:prstGeom>
-          <a:noFill/>
-          <a:ln w="9525">
-            <a:noFill/>
-            <a:miter lim="800000"/>
-            <a:headEnd/>
-            <a:tailEnd/>
-          </a:ln>
-        </p:spPr>
-      </p:pic>
-    </p:spTree>
-  </p:cSld>
-  <p:clrMapOvr>
-    <a:masterClrMapping/>
-  </p:clrMapOvr>
-</p:sld>
-</file>
-
-<file path=ppt/slides/slide25.xml><?xml version="1.0" encoding="utf-8"?>
+<file path=ppt/slides/slide23.xml><?xml version="1.0" encoding="utf-8"?>
 <p:sld xmlns:a="http://schemas.openxmlformats.org/drawingml/2006/main" xmlns:r="http://schemas.openxmlformats.org/officeDocument/2006/relationships" xmlns:p="http://schemas.openxmlformats.org/presentationml/2006/main">
   <p:cSld>
     <p:spTree>
@@ -5735,6 +5624,276 @@
 </p:sld>
 </file>
 
+<file path=ppt/slides/slide24.xml><?xml version="1.0" encoding="utf-8"?>
+<p:sld xmlns:a="http://schemas.openxmlformats.org/drawingml/2006/main" xmlns:r="http://schemas.openxmlformats.org/officeDocument/2006/relationships" xmlns:p="http://schemas.openxmlformats.org/presentationml/2006/main">
+  <p:cSld>
+    <p:spTree>
+      <p:nvGrpSpPr>
+        <p:cNvPr id="1" name=""/>
+        <p:cNvGrpSpPr/>
+        <p:nvPr/>
+      </p:nvGrpSpPr>
+      <p:grpSpPr>
+        <a:xfrm>
+          <a:off x="0" y="0"/>
+          <a:ext cx="0" cy="0"/>
+          <a:chOff x="0" y="0"/>
+          <a:chExt cx="0" cy="0"/>
+        </a:xfrm>
+      </p:grpSpPr>
+      <p:sp>
+        <p:nvSpPr>
+          <p:cNvPr id="2" name="Title 1"/>
+          <p:cNvSpPr>
+            <a:spLocks noGrp="1"/>
+          </p:cNvSpPr>
+          <p:nvPr>
+            <p:ph type="title"/>
+          </p:nvPr>
+        </p:nvSpPr>
+        <p:spPr/>
+        <p:txBody>
+          <a:bodyPr/>
+          <a:lstStyle/>
+          <a:p>
+            <a:pPr algn="l"/>
+            <a:r>
+              <a:rPr lang="en-US" dirty="0" smtClean="0"/>
+              <a:t>1. Create App with Emergent</a:t>
+            </a:r>
+            <a:endParaRPr lang="en-US" dirty="0"/>
+          </a:p>
+        </p:txBody>
+      </p:sp>
+      <p:sp>
+        <p:nvSpPr>
+          <p:cNvPr id="3" name="Content Placeholder 2"/>
+          <p:cNvSpPr>
+            <a:spLocks noGrp="1"/>
+          </p:cNvSpPr>
+          <p:nvPr>
+            <p:ph idx="1"/>
+          </p:nvPr>
+        </p:nvSpPr>
+        <p:spPr/>
+        <p:txBody>
+          <a:bodyPr/>
+          <a:lstStyle/>
+          <a:p>
+            <a:r>
+              <a:rPr lang="en-US" dirty="0" smtClean="0">
+                <a:hlinkClick r:id="rId2"/>
+              </a:rPr>
+              <a:t>https://app.emergent.sh</a:t>
+            </a:r>
+            <a:endParaRPr lang="en-US" dirty="0" smtClean="0"/>
+          </a:p>
+          <a:p>
+            <a:endParaRPr lang="en-US" dirty="0"/>
+          </a:p>
+        </p:txBody>
+      </p:sp>
+      <p:pic>
+        <p:nvPicPr>
+          <p:cNvPr id="1026" name="Picture 2"/>
+          <p:cNvPicPr>
+            <a:picLocks noChangeAspect="1" noChangeArrowheads="1"/>
+          </p:cNvPicPr>
+          <p:nvPr/>
+        </p:nvPicPr>
+        <p:blipFill>
+          <a:blip r:embed="rId3" cstate="print"/>
+          <a:srcRect/>
+          <a:stretch>
+            <a:fillRect/>
+          </a:stretch>
+        </p:blipFill>
+        <p:spPr bwMode="auto">
+          <a:xfrm>
+            <a:off x="914400" y="2743200"/>
+            <a:ext cx="7218081" cy="3331694"/>
+          </a:xfrm>
+          <a:prstGeom prst="rect">
+            <a:avLst/>
+          </a:prstGeom>
+          <a:noFill/>
+          <a:ln w="9525">
+            <a:noFill/>
+            <a:miter lim="800000"/>
+            <a:headEnd/>
+            <a:tailEnd/>
+          </a:ln>
+        </p:spPr>
+      </p:pic>
+    </p:spTree>
+  </p:cSld>
+  <p:clrMapOvr>
+    <a:masterClrMapping/>
+  </p:clrMapOvr>
+</p:sld>
+</file>
+
+<file path=ppt/slides/slide25.xml><?xml version="1.0" encoding="utf-8"?>
+<p:sld xmlns:a="http://schemas.openxmlformats.org/drawingml/2006/main" xmlns:r="http://schemas.openxmlformats.org/officeDocument/2006/relationships" xmlns:p="http://schemas.openxmlformats.org/presentationml/2006/main">
+  <p:cSld>
+    <p:spTree>
+      <p:nvGrpSpPr>
+        <p:cNvPr id="1" name=""/>
+        <p:cNvGrpSpPr/>
+        <p:nvPr/>
+      </p:nvGrpSpPr>
+      <p:grpSpPr>
+        <a:xfrm>
+          <a:off x="0" y="0"/>
+          <a:ext cx="0" cy="0"/>
+          <a:chOff x="0" y="0"/>
+          <a:chExt cx="0" cy="0"/>
+        </a:xfrm>
+      </p:grpSpPr>
+      <p:sp>
+        <p:nvSpPr>
+          <p:cNvPr id="2" name="Title 1"/>
+          <p:cNvSpPr>
+            <a:spLocks noGrp="1"/>
+          </p:cNvSpPr>
+          <p:nvPr>
+            <p:ph type="title"/>
+          </p:nvPr>
+        </p:nvSpPr>
+        <p:spPr/>
+        <p:txBody>
+          <a:bodyPr/>
+          <a:lstStyle/>
+          <a:p>
+            <a:r>
+              <a:rPr lang="en-US" dirty="0" smtClean="0"/>
+              <a:t>The Two Prompts</a:t>
+            </a:r>
+            <a:endParaRPr lang="en-US" dirty="0"/>
+          </a:p>
+        </p:txBody>
+      </p:sp>
+      <p:sp>
+        <p:nvSpPr>
+          <p:cNvPr id="3" name="Content Placeholder 2"/>
+          <p:cNvSpPr>
+            <a:spLocks noGrp="1"/>
+          </p:cNvSpPr>
+          <p:nvPr>
+            <p:ph idx="1"/>
+          </p:nvPr>
+        </p:nvSpPr>
+        <p:spPr/>
+        <p:txBody>
+          <a:bodyPr/>
+          <a:lstStyle/>
+          <a:p>
+            <a:r>
+              <a:rPr lang="en-US" sz="1200" b="1" dirty="0" smtClean="0"/>
+              <a:t>Create a prototype for an Inventory Management System with the following PRD:</a:t>
+            </a:r>
+          </a:p>
+          <a:p>
+            <a:endParaRPr lang="en-US" sz="1200" dirty="0" smtClean="0"/>
+          </a:p>
+          <a:p>
+            <a:r>
+              <a:rPr lang="en-US" sz="1200" dirty="0" smtClean="0"/>
+              <a:t>Inventory Management System</a:t>
+            </a:r>
+          </a:p>
+          <a:p>
+            <a:endParaRPr lang="en-US" sz="1200" dirty="0" smtClean="0"/>
+          </a:p>
+          <a:p>
+            <a:r>
+              <a:rPr lang="en-US" sz="1200" dirty="0" smtClean="0"/>
+              <a:t>A comprehensive, FDA-compliant lot tracking inventory system for pharmaceutical and laboratory environments.</a:t>
+            </a:r>
+          </a:p>
+          <a:p>
+            <a:endParaRPr lang="en-US" sz="1200" dirty="0" smtClean="0"/>
+          </a:p>
+          <a:p>
+            <a:r>
+              <a:rPr lang="en-US" sz="1200" dirty="0" smtClean="0"/>
+              <a:t>## 🚀 Features</a:t>
+            </a:r>
+          </a:p>
+          <a:p>
+            <a:endParaRPr lang="en-US" sz="1200" dirty="0" smtClean="0"/>
+          </a:p>
+          <a:p>
+            <a:r>
+              <a:rPr lang="en-US" sz="1200" dirty="0" smtClean="0"/>
+              <a:t>### Core Functionality</a:t>
+            </a:r>
+          </a:p>
+          <a:p>
+            <a:r>
+              <a:rPr lang="en-US" sz="1200" dirty="0" smtClean="0"/>
+              <a:t>- **Material Master Data Management** - Centralized material information with TG part numbers</a:t>
+            </a:r>
+          </a:p>
+          <a:p>
+            <a:r>
+              <a:rPr lang="en-US" sz="1200" dirty="0" smtClean="0"/>
+              <a:t>- **Lot Tracking &amp; Control** - Complete traceability from receipt to usage</a:t>
+            </a:r>
+          </a:p>
+          <a:p>
+            <a:r>
+              <a:rPr lang="en-US" sz="1200" dirty="0" smtClean="0"/>
+              <a:t>- **Production Batch Management** - Track production batches with full genealogy</a:t>
+            </a:r>
+          </a:p>
+          <a:p>
+            <a:r>
+              <a:rPr lang="en-US" sz="1200" dirty="0" smtClean="0"/>
+              <a:t>- **Quality Control Integration** - QC testing and acceptance workflows</a:t>
+            </a:r>
+          </a:p>
+          <a:p>
+            <a:r>
+              <a:rPr lang="en-US" sz="1200" dirty="0" smtClean="0"/>
+              <a:t>- **Label Generation &amp; Printing** - Barcode labels for materials and samples</a:t>
+            </a:r>
+          </a:p>
+          <a:p>
+            <a:r>
+              <a:rPr lang="en-US" sz="1200" dirty="0" smtClean="0"/>
+              <a:t>- **Comprehensive Reporting** - Advanced reporting with caching and scheduling</a:t>
+            </a:r>
+          </a:p>
+          <a:p>
+            <a:endParaRPr lang="en-US" sz="1200" dirty="0" smtClean="0"/>
+          </a:p>
+          <a:p>
+            <a:r>
+              <a:rPr lang="en-US" sz="1200" dirty="0" smtClean="0"/>
+              <a:t>----------</a:t>
+            </a:r>
+          </a:p>
+          <a:p>
+            <a:endParaRPr lang="en-US" sz="1200" dirty="0" smtClean="0"/>
+          </a:p>
+          <a:p>
+            <a:r>
+              <a:rPr lang="en-US" sz="1200" b="1" dirty="0" smtClean="0"/>
+              <a:t>Choose the default options for all the questions.</a:t>
+            </a:r>
+            <a:endParaRPr lang="en-US" sz="1200" b="1" dirty="0"/>
+          </a:p>
+        </p:txBody>
+      </p:sp>
+    </p:spTree>
+  </p:cSld>
+  <p:clrMapOvr>
+    <a:masterClrMapping/>
+  </p:clrMapOvr>
+</p:sld>
+</file>
+
 <file path=ppt/slides/slide26.xml><?xml version="1.0" encoding="utf-8"?>
 <p:sld xmlns:a="http://schemas.openxmlformats.org/drawingml/2006/main" xmlns:r="http://schemas.openxmlformats.org/officeDocument/2006/relationships" xmlns:p="http://schemas.openxmlformats.org/presentationml/2006/main">
   <p:cSld>
@@ -5767,52 +5926,25 @@
           <a:bodyPr/>
           <a:lstStyle/>
           <a:p>
+            <a:pPr algn="l"/>
             <a:r>
               <a:rPr lang="en-US" dirty="0" smtClean="0"/>
-              <a:t>Generative UI Tools</a:t>
+              <a:t>2. Preview or Deploy the App</a:t>
             </a:r>
             <a:endParaRPr lang="en-US" dirty="0"/>
-          </a:p>
-        </p:txBody>
-      </p:sp>
-      <p:sp>
-        <p:nvSpPr>
-          <p:cNvPr id="3" name="Content Placeholder 2"/>
-          <p:cNvSpPr>
-            <a:spLocks noGrp="1"/>
-          </p:cNvSpPr>
-          <p:nvPr>
-            <p:ph idx="1"/>
-          </p:nvPr>
-        </p:nvSpPr>
-        <p:spPr/>
-        <p:txBody>
-          <a:bodyPr/>
-          <a:lstStyle/>
-          <a:p>
-            <a:r>
-              <a:rPr lang="en-US" smtClean="0">
-                <a:hlinkClick r:id="rId2"/>
-              </a:rPr>
-              <a:t>https://v0.dev/</a:t>
-            </a:r>
-            <a:endParaRPr lang="en-US" smtClean="0"/>
-          </a:p>
-          <a:p>
-            <a:endParaRPr lang="en-US"/>
           </a:p>
         </p:txBody>
       </p:sp>
       <p:pic>
         <p:nvPicPr>
-          <p:cNvPr id="2050" name="Picture 2" descr="https://cdn3d.iconscout.com/3d/premium/thumb/ai-agency-core-3d-icon-png-download-12002312.png"/>
+          <p:cNvPr id="2050" name="Picture 2"/>
           <p:cNvPicPr>
             <a:picLocks noChangeAspect="1" noChangeArrowheads="1"/>
           </p:cNvPicPr>
           <p:nvPr/>
         </p:nvPicPr>
         <p:blipFill>
-          <a:blip r:embed="rId3" cstate="print"/>
+          <a:blip r:embed="rId2" cstate="print"/>
           <a:srcRect/>
           <a:stretch>
             <a:fillRect/>
@@ -5820,13 +5952,19 @@
         </p:blipFill>
         <p:spPr bwMode="auto">
           <a:xfrm>
-            <a:off x="3505200" y="3657600"/>
-            <a:ext cx="2143125" cy="2143125"/>
+            <a:off x="762000" y="2667000"/>
+            <a:ext cx="7525043" cy="2876342"/>
           </a:xfrm>
           <a:prstGeom prst="rect">
             <a:avLst/>
           </a:prstGeom>
           <a:noFill/>
+          <a:ln w="9525">
+            <a:noFill/>
+            <a:miter lim="800000"/>
+            <a:headEnd/>
+            <a:tailEnd/>
+          </a:ln>
         </p:spPr>
       </p:pic>
     </p:spTree>
@@ -5869,56 +6007,25 @@
           <a:bodyPr/>
           <a:lstStyle/>
           <a:p>
-            <a:r>
-              <a:rPr lang="en-US" smtClean="0"/>
-              <a:t>Code Review </a:t>
-            </a:r>
+            <a:pPr algn="l"/>
             <a:r>
               <a:rPr lang="en-US" dirty="0" smtClean="0"/>
-              <a:t>Tools</a:t>
-            </a:r>
-            <a:endParaRPr lang="en-US" dirty="0"/>
-          </a:p>
-        </p:txBody>
-      </p:sp>
-      <p:sp>
-        <p:nvSpPr>
-          <p:cNvPr id="3" name="Content Placeholder 2"/>
-          <p:cNvSpPr>
-            <a:spLocks noGrp="1"/>
-          </p:cNvSpPr>
-          <p:nvPr>
-            <p:ph idx="1"/>
-          </p:nvPr>
-        </p:nvSpPr>
-        <p:spPr/>
-        <p:txBody>
-          <a:bodyPr/>
-          <a:lstStyle/>
-          <a:p>
-            <a:r>
-              <a:rPr lang="en-US" dirty="0" smtClean="0">
-                <a:hlinkClick r:id="rId2"/>
-              </a:rPr>
-              <a:t>https://graphite.com/</a:t>
-            </a:r>
-            <a:endParaRPr lang="en-US" dirty="0" smtClean="0"/>
-          </a:p>
-          <a:p>
+              <a:t>3. Review the App Features</a:t>
+            </a:r>
             <a:endParaRPr lang="en-US" dirty="0"/>
           </a:p>
         </p:txBody>
       </p:sp>
       <p:pic>
         <p:nvPicPr>
-          <p:cNvPr id="2050" name="Picture 2" descr="https://cdn3d.iconscout.com/3d/premium/thumb/ai-agency-core-3d-icon-png-download-12002312.png"/>
+          <p:cNvPr id="3074" name="Picture 2"/>
           <p:cNvPicPr>
             <a:picLocks noChangeAspect="1" noChangeArrowheads="1"/>
           </p:cNvPicPr>
           <p:nvPr/>
         </p:nvPicPr>
         <p:blipFill>
-          <a:blip r:embed="rId3" cstate="print"/>
+          <a:blip r:embed="rId2" cstate="print"/>
           <a:srcRect/>
           <a:stretch>
             <a:fillRect/>
@@ -5926,13 +6033,19 @@
         </p:blipFill>
         <p:spPr bwMode="auto">
           <a:xfrm>
-            <a:off x="3505200" y="3657600"/>
-            <a:ext cx="2143125" cy="2143125"/>
+            <a:off x="933450" y="1898650"/>
+            <a:ext cx="7277100" cy="3740150"/>
           </a:xfrm>
           <a:prstGeom prst="rect">
             <a:avLst/>
           </a:prstGeom>
           <a:noFill/>
+          <a:ln w="9525">
+            <a:noFill/>
+            <a:miter lim="800000"/>
+            <a:headEnd/>
+            <a:tailEnd/>
+          </a:ln>
         </p:spPr>
       </p:pic>
     </p:spTree>
@@ -5944,108 +6057,6 @@
 </file>
 
 <file path=ppt/slides/slide28.xml><?xml version="1.0" encoding="utf-8"?>
-<p:sld xmlns:a="http://schemas.openxmlformats.org/drawingml/2006/main" xmlns:r="http://schemas.openxmlformats.org/officeDocument/2006/relationships" xmlns:p="http://schemas.openxmlformats.org/presentationml/2006/main">
-  <p:cSld>
-    <p:spTree>
-      <p:nvGrpSpPr>
-        <p:cNvPr id="1" name=""/>
-        <p:cNvGrpSpPr/>
-        <p:nvPr/>
-      </p:nvGrpSpPr>
-      <p:grpSpPr>
-        <a:xfrm>
-          <a:off x="0" y="0"/>
-          <a:ext cx="0" cy="0"/>
-          <a:chOff x="0" y="0"/>
-          <a:chExt cx="0" cy="0"/>
-        </a:xfrm>
-      </p:grpSpPr>
-      <p:sp>
-        <p:nvSpPr>
-          <p:cNvPr id="2" name="Title 1"/>
-          <p:cNvSpPr>
-            <a:spLocks noGrp="1"/>
-          </p:cNvSpPr>
-          <p:nvPr>
-            <p:ph type="title"/>
-          </p:nvPr>
-        </p:nvSpPr>
-        <p:spPr/>
-        <p:txBody>
-          <a:bodyPr/>
-          <a:lstStyle/>
-          <a:p>
-            <a:r>
-              <a:rPr lang="en-US" dirty="0" smtClean="0"/>
-              <a:t>Database Schema Refactoring Tools</a:t>
-            </a:r>
-            <a:endParaRPr lang="en-US" dirty="0"/>
-          </a:p>
-        </p:txBody>
-      </p:sp>
-      <p:sp>
-        <p:nvSpPr>
-          <p:cNvPr id="3" name="Content Placeholder 2"/>
-          <p:cNvSpPr>
-            <a:spLocks noGrp="1"/>
-          </p:cNvSpPr>
-          <p:nvPr>
-            <p:ph idx="1"/>
-          </p:nvPr>
-        </p:nvSpPr>
-        <p:spPr/>
-        <p:txBody>
-          <a:bodyPr/>
-          <a:lstStyle/>
-          <a:p>
-            <a:r>
-              <a:rPr lang="en-US" sz="2800" dirty="0" smtClean="0">
-                <a:hlinkClick r:id="rId2"/>
-              </a:rPr>
-              <a:t>https://neon.com/guides/openai-codex-neon-mcp</a:t>
-            </a:r>
-            <a:endParaRPr lang="en-US" sz="2800" dirty="0" smtClean="0"/>
-          </a:p>
-          <a:p>
-            <a:endParaRPr lang="en-US" sz="2800" dirty="0"/>
-          </a:p>
-        </p:txBody>
-      </p:sp>
-      <p:pic>
-        <p:nvPicPr>
-          <p:cNvPr id="2050" name="Picture 2" descr="https://cdn3d.iconscout.com/3d/premium/thumb/ai-agency-core-3d-icon-png-download-12002312.png"/>
-          <p:cNvPicPr>
-            <a:picLocks noChangeAspect="1" noChangeArrowheads="1"/>
-          </p:cNvPicPr>
-          <p:nvPr/>
-        </p:nvPicPr>
-        <p:blipFill>
-          <a:blip r:embed="rId3" cstate="print"/>
-          <a:srcRect/>
-          <a:stretch>
-            <a:fillRect/>
-          </a:stretch>
-        </p:blipFill>
-        <p:spPr bwMode="auto">
-          <a:xfrm>
-            <a:off x="3505200" y="3657600"/>
-            <a:ext cx="2143125" cy="2143125"/>
-          </a:xfrm>
-          <a:prstGeom prst="rect">
-            <a:avLst/>
-          </a:prstGeom>
-          <a:noFill/>
-        </p:spPr>
-      </p:pic>
-    </p:spTree>
-  </p:cSld>
-  <p:clrMapOvr>
-    <a:masterClrMapping/>
-  </p:clrMapOvr>
-</p:sld>
-</file>
-
-<file path=ppt/slides/slide29.xml><?xml version="1.0" encoding="utf-8"?>
 <p:sld xmlns:a="http://schemas.openxmlformats.org/drawingml/2006/main" xmlns:r="http://schemas.openxmlformats.org/officeDocument/2006/relationships" xmlns:p="http://schemas.openxmlformats.org/presentationml/2006/main">
   <p:cSld>
     <p:spTree>
@@ -6081,6 +6092,108 @@
           <a:xfrm>
             <a:off x="3276600" y="1905000"/>
             <a:ext cx="2857500" cy="2857500"/>
+          </a:xfrm>
+          <a:prstGeom prst="rect">
+            <a:avLst/>
+          </a:prstGeom>
+          <a:noFill/>
+        </p:spPr>
+      </p:pic>
+    </p:spTree>
+  </p:cSld>
+  <p:clrMapOvr>
+    <a:masterClrMapping/>
+  </p:clrMapOvr>
+</p:sld>
+</file>
+
+<file path=ppt/slides/slide29.xml><?xml version="1.0" encoding="utf-8"?>
+<p:sld xmlns:a="http://schemas.openxmlformats.org/drawingml/2006/main" xmlns:r="http://schemas.openxmlformats.org/officeDocument/2006/relationships" xmlns:p="http://schemas.openxmlformats.org/presentationml/2006/main">
+  <p:cSld>
+    <p:spTree>
+      <p:nvGrpSpPr>
+        <p:cNvPr id="1" name=""/>
+        <p:cNvGrpSpPr/>
+        <p:nvPr/>
+      </p:nvGrpSpPr>
+      <p:grpSpPr>
+        <a:xfrm>
+          <a:off x="0" y="0"/>
+          <a:ext cx="0" cy="0"/>
+          <a:chOff x="0" y="0"/>
+          <a:chExt cx="0" cy="0"/>
+        </a:xfrm>
+      </p:grpSpPr>
+      <p:sp>
+        <p:nvSpPr>
+          <p:cNvPr id="2" name="Title 1"/>
+          <p:cNvSpPr>
+            <a:spLocks noGrp="1"/>
+          </p:cNvSpPr>
+          <p:nvPr>
+            <p:ph type="title"/>
+          </p:nvPr>
+        </p:nvSpPr>
+        <p:spPr/>
+        <p:txBody>
+          <a:bodyPr/>
+          <a:lstStyle/>
+          <a:p>
+            <a:r>
+              <a:rPr lang="en-US" dirty="0" smtClean="0"/>
+              <a:t>Generative UI Tools</a:t>
+            </a:r>
+            <a:endParaRPr lang="en-US" dirty="0"/>
+          </a:p>
+        </p:txBody>
+      </p:sp>
+      <p:sp>
+        <p:nvSpPr>
+          <p:cNvPr id="3" name="Content Placeholder 2"/>
+          <p:cNvSpPr>
+            <a:spLocks noGrp="1"/>
+          </p:cNvSpPr>
+          <p:nvPr>
+            <p:ph idx="1"/>
+          </p:nvPr>
+        </p:nvSpPr>
+        <p:spPr/>
+        <p:txBody>
+          <a:bodyPr/>
+          <a:lstStyle/>
+          <a:p>
+            <a:r>
+              <a:rPr lang="en-US" smtClean="0">
+                <a:hlinkClick r:id="rId2"/>
+              </a:rPr>
+              <a:t>https://v0.dev/</a:t>
+            </a:r>
+            <a:endParaRPr lang="en-US" smtClean="0"/>
+          </a:p>
+          <a:p>
+            <a:endParaRPr lang="en-US"/>
+          </a:p>
+        </p:txBody>
+      </p:sp>
+      <p:pic>
+        <p:nvPicPr>
+          <p:cNvPr id="2050" name="Picture 2" descr="https://cdn3d.iconscout.com/3d/premium/thumb/ai-agency-core-3d-icon-png-download-12002312.png"/>
+          <p:cNvPicPr>
+            <a:picLocks noChangeAspect="1" noChangeArrowheads="1"/>
+          </p:cNvPicPr>
+          <p:nvPr/>
+        </p:nvPicPr>
+        <p:blipFill>
+          <a:blip r:embed="rId3" cstate="print"/>
+          <a:srcRect/>
+          <a:stretch>
+            <a:fillRect/>
+          </a:stretch>
+        </p:blipFill>
+        <p:spPr bwMode="auto">
+          <a:xfrm>
+            <a:off x="3505200" y="3657600"/>
+            <a:ext cx="2143125" cy="2143125"/>
           </a:xfrm>
           <a:prstGeom prst="rect">
             <a:avLst/>
@@ -6236,10 +6349,13 @@
           <a:bodyPr/>
           <a:lstStyle/>
           <a:p>
-            <a:pPr algn="l"/>
+            <a:r>
+              <a:rPr lang="en-US" smtClean="0"/>
+              <a:t>Code Review </a:t>
+            </a:r>
             <a:r>
               <a:rPr lang="en-US" dirty="0" smtClean="0"/>
-              <a:t>1. Install Google Antigravity</a:t>
+              <a:t>Tools</a:t>
             </a:r>
             <a:endParaRPr lang="en-US" dirty="0"/>
           </a:p>
@@ -6264,7 +6380,7 @@
               <a:rPr lang="en-US" dirty="0" smtClean="0">
                 <a:hlinkClick r:id="rId2"/>
               </a:rPr>
-              <a:t>https://antigravity.google/download</a:t>
+              <a:t>https://graphite.com/</a:t>
             </a:r>
             <a:endParaRPr lang="en-US" dirty="0" smtClean="0"/>
           </a:p>
@@ -6273,6 +6389,32 @@
           </a:p>
         </p:txBody>
       </p:sp>
+      <p:pic>
+        <p:nvPicPr>
+          <p:cNvPr id="2050" name="Picture 2" descr="https://cdn3d.iconscout.com/3d/premium/thumb/ai-agency-core-3d-icon-png-download-12002312.png"/>
+          <p:cNvPicPr>
+            <a:picLocks noChangeAspect="1" noChangeArrowheads="1"/>
+          </p:cNvPicPr>
+          <p:nvPr/>
+        </p:nvPicPr>
+        <p:blipFill>
+          <a:blip r:embed="rId3" cstate="print"/>
+          <a:srcRect/>
+          <a:stretch>
+            <a:fillRect/>
+          </a:stretch>
+        </p:blipFill>
+        <p:spPr bwMode="auto">
+          <a:xfrm>
+            <a:off x="3505200" y="3657600"/>
+            <a:ext cx="2143125" cy="2143125"/>
+          </a:xfrm>
+          <a:prstGeom prst="rect">
+            <a:avLst/>
+          </a:prstGeom>
+          <a:noFill/>
+        </p:spPr>
+      </p:pic>
     </p:spTree>
   </p:cSld>
   <p:clrMapOvr>
@@ -6282,6 +6424,108 @@
 </file>
 
 <file path=ppt/slides/slide31.xml><?xml version="1.0" encoding="utf-8"?>
+<p:sld xmlns:a="http://schemas.openxmlformats.org/drawingml/2006/main" xmlns:r="http://schemas.openxmlformats.org/officeDocument/2006/relationships" xmlns:p="http://schemas.openxmlformats.org/presentationml/2006/main">
+  <p:cSld>
+    <p:spTree>
+      <p:nvGrpSpPr>
+        <p:cNvPr id="1" name=""/>
+        <p:cNvGrpSpPr/>
+        <p:nvPr/>
+      </p:nvGrpSpPr>
+      <p:grpSpPr>
+        <a:xfrm>
+          <a:off x="0" y="0"/>
+          <a:ext cx="0" cy="0"/>
+          <a:chOff x="0" y="0"/>
+          <a:chExt cx="0" cy="0"/>
+        </a:xfrm>
+      </p:grpSpPr>
+      <p:sp>
+        <p:nvSpPr>
+          <p:cNvPr id="2" name="Title 1"/>
+          <p:cNvSpPr>
+            <a:spLocks noGrp="1"/>
+          </p:cNvSpPr>
+          <p:nvPr>
+            <p:ph type="title"/>
+          </p:nvPr>
+        </p:nvSpPr>
+        <p:spPr/>
+        <p:txBody>
+          <a:bodyPr/>
+          <a:lstStyle/>
+          <a:p>
+            <a:r>
+              <a:rPr lang="en-US" dirty="0" smtClean="0"/>
+              <a:t>Database Schema Refactoring Tools</a:t>
+            </a:r>
+            <a:endParaRPr lang="en-US" dirty="0"/>
+          </a:p>
+        </p:txBody>
+      </p:sp>
+      <p:sp>
+        <p:nvSpPr>
+          <p:cNvPr id="3" name="Content Placeholder 2"/>
+          <p:cNvSpPr>
+            <a:spLocks noGrp="1"/>
+          </p:cNvSpPr>
+          <p:nvPr>
+            <p:ph idx="1"/>
+          </p:nvPr>
+        </p:nvSpPr>
+        <p:spPr/>
+        <p:txBody>
+          <a:bodyPr/>
+          <a:lstStyle/>
+          <a:p>
+            <a:r>
+              <a:rPr lang="en-US" sz="2800" dirty="0" smtClean="0">
+                <a:hlinkClick r:id="rId2"/>
+              </a:rPr>
+              <a:t>https://neon.com/guides/openai-codex-neon-mcp</a:t>
+            </a:r>
+            <a:endParaRPr lang="en-US" sz="2800" dirty="0" smtClean="0"/>
+          </a:p>
+          <a:p>
+            <a:endParaRPr lang="en-US" sz="2800" dirty="0"/>
+          </a:p>
+        </p:txBody>
+      </p:sp>
+      <p:pic>
+        <p:nvPicPr>
+          <p:cNvPr id="2050" name="Picture 2" descr="https://cdn3d.iconscout.com/3d/premium/thumb/ai-agency-core-3d-icon-png-download-12002312.png"/>
+          <p:cNvPicPr>
+            <a:picLocks noChangeAspect="1" noChangeArrowheads="1"/>
+          </p:cNvPicPr>
+          <p:nvPr/>
+        </p:nvPicPr>
+        <p:blipFill>
+          <a:blip r:embed="rId3" cstate="print"/>
+          <a:srcRect/>
+          <a:stretch>
+            <a:fillRect/>
+          </a:stretch>
+        </p:blipFill>
+        <p:spPr bwMode="auto">
+          <a:xfrm>
+            <a:off x="3505200" y="3657600"/>
+            <a:ext cx="2143125" cy="2143125"/>
+          </a:xfrm>
+          <a:prstGeom prst="rect">
+            <a:avLst/>
+          </a:prstGeom>
+          <a:noFill/>
+        </p:spPr>
+      </p:pic>
+    </p:spTree>
+  </p:cSld>
+  <p:clrMapOvr>
+    <a:masterClrMapping/>
+  </p:clrMapOvr>
+</p:sld>
+</file>
+
+<file path=ppt/slides/slide32.xml><?xml version="1.0" encoding="utf-8"?>
 <p:sld xmlns:a="http://schemas.openxmlformats.org/drawingml/2006/main" xmlns:r="http://schemas.openxmlformats.org/officeDocument/2006/relationships" xmlns:p="http://schemas.openxmlformats.org/presentationml/2006/main">
   <p:cSld>
     <p:spTree>
@@ -6332,7 +6576,7 @@
 </p:sld>
 </file>
 
-<file path=ppt/slides/slide32.xml><?xml version="1.0" encoding="utf-8"?>
+<file path=ppt/slides/slide33.xml><?xml version="1.0" encoding="utf-8"?>
 <p:sld xmlns:a="http://schemas.openxmlformats.org/drawingml/2006/main" xmlns:r="http://schemas.openxmlformats.org/officeDocument/2006/relationships" xmlns:p="http://schemas.openxmlformats.org/presentationml/2006/main">
   <p:cSld>
     <p:spTree>
@@ -6367,7 +6611,7 @@
             <a:pPr algn="l"/>
             <a:r>
               <a:rPr lang="en-US" dirty="0" smtClean="0"/>
-              <a:t>1. Register Cline Account</a:t>
+              <a:t>1. Install Google Antigravity</a:t>
             </a:r>
             <a:endParaRPr lang="en-US" dirty="0"/>
           </a:p>
@@ -6392,7 +6636,7 @@
               <a:rPr lang="en-US" dirty="0" smtClean="0">
                 <a:hlinkClick r:id="rId2"/>
               </a:rPr>
-              <a:t>https://cline.bot/pricing</a:t>
+              <a:t>https://antigravity.google/download</a:t>
             </a:r>
             <a:endParaRPr lang="en-US" dirty="0" smtClean="0"/>
           </a:p>
@@ -6409,7 +6653,135 @@
 </p:sld>
 </file>
 
-<file path=ppt/slides/slide33.xml><?xml version="1.0" encoding="utf-8"?>
+<file path=ppt/slides/slide34.xml><?xml version="1.0" encoding="utf-8"?>
+<p:sld xmlns:a="http://schemas.openxmlformats.org/drawingml/2006/main" xmlns:r="http://schemas.openxmlformats.org/officeDocument/2006/relationships" xmlns:p="http://schemas.openxmlformats.org/presentationml/2006/main">
+  <p:cSld>
+    <p:spTree>
+      <p:nvGrpSpPr>
+        <p:cNvPr id="1" name=""/>
+        <p:cNvGrpSpPr/>
+        <p:nvPr/>
+      </p:nvGrpSpPr>
+      <p:grpSpPr>
+        <a:xfrm>
+          <a:off x="0" y="0"/>
+          <a:ext cx="0" cy="0"/>
+          <a:chOff x="0" y="0"/>
+          <a:chExt cx="0" cy="0"/>
+        </a:xfrm>
+      </p:grpSpPr>
+      <p:pic>
+        <p:nvPicPr>
+          <p:cNvPr id="4" name="Picture 2" descr="https://lh3.ggpht.com/1IfZLL2QDSjZ0wS7sUhaMlsAOS8BBzdR3wZ1WawgRn7KZAM8nEVZYMOUM-lqQb0ikIzp=w300"/>
+          <p:cNvPicPr>
+            <a:picLocks noChangeAspect="1" noChangeArrowheads="1"/>
+          </p:cNvPicPr>
+          <p:nvPr/>
+        </p:nvPicPr>
+        <p:blipFill>
+          <a:blip r:embed="rId2" cstate="print"/>
+          <a:srcRect/>
+          <a:stretch>
+            <a:fillRect/>
+          </a:stretch>
+        </p:blipFill>
+        <p:spPr bwMode="auto">
+          <a:xfrm>
+            <a:off x="3276600" y="1905000"/>
+            <a:ext cx="2857500" cy="2857500"/>
+          </a:xfrm>
+          <a:prstGeom prst="rect">
+            <a:avLst/>
+          </a:prstGeom>
+          <a:noFill/>
+        </p:spPr>
+      </p:pic>
+    </p:spTree>
+  </p:cSld>
+  <p:clrMapOvr>
+    <a:masterClrMapping/>
+  </p:clrMapOvr>
+</p:sld>
+</file>
+
+<file path=ppt/slides/slide35.xml><?xml version="1.0" encoding="utf-8"?>
+<p:sld xmlns:a="http://schemas.openxmlformats.org/drawingml/2006/main" xmlns:r="http://schemas.openxmlformats.org/officeDocument/2006/relationships" xmlns:p="http://schemas.openxmlformats.org/presentationml/2006/main">
+  <p:cSld>
+    <p:spTree>
+      <p:nvGrpSpPr>
+        <p:cNvPr id="1" name=""/>
+        <p:cNvGrpSpPr/>
+        <p:nvPr/>
+      </p:nvGrpSpPr>
+      <p:grpSpPr>
+        <a:xfrm>
+          <a:off x="0" y="0"/>
+          <a:ext cx="0" cy="0"/>
+          <a:chOff x="0" y="0"/>
+          <a:chExt cx="0" cy="0"/>
+        </a:xfrm>
+      </p:grpSpPr>
+      <p:sp>
+        <p:nvSpPr>
+          <p:cNvPr id="2" name="Title 1"/>
+          <p:cNvSpPr>
+            <a:spLocks noGrp="1"/>
+          </p:cNvSpPr>
+          <p:nvPr>
+            <p:ph type="title"/>
+          </p:nvPr>
+        </p:nvSpPr>
+        <p:spPr/>
+        <p:txBody>
+          <a:bodyPr/>
+          <a:lstStyle/>
+          <a:p>
+            <a:pPr algn="l"/>
+            <a:r>
+              <a:rPr lang="en-US" dirty="0" smtClean="0"/>
+              <a:t>1. Register Cline Account</a:t>
+            </a:r>
+            <a:endParaRPr lang="en-US" dirty="0"/>
+          </a:p>
+        </p:txBody>
+      </p:sp>
+      <p:sp>
+        <p:nvSpPr>
+          <p:cNvPr id="3" name="Content Placeholder 2"/>
+          <p:cNvSpPr>
+            <a:spLocks noGrp="1"/>
+          </p:cNvSpPr>
+          <p:nvPr>
+            <p:ph idx="1"/>
+          </p:nvPr>
+        </p:nvSpPr>
+        <p:spPr/>
+        <p:txBody>
+          <a:bodyPr/>
+          <a:lstStyle/>
+          <a:p>
+            <a:r>
+              <a:rPr lang="en-US" dirty="0" smtClean="0">
+                <a:hlinkClick r:id="rId2"/>
+              </a:rPr>
+              <a:t>https://cline.bot/pricing</a:t>
+            </a:r>
+            <a:endParaRPr lang="en-US" dirty="0" smtClean="0"/>
+          </a:p>
+          <a:p>
+            <a:endParaRPr lang="en-US" dirty="0"/>
+          </a:p>
+        </p:txBody>
+      </p:sp>
+    </p:spTree>
+  </p:cSld>
+  <p:clrMapOvr>
+    <a:masterClrMapping/>
+  </p:clrMapOvr>
+</p:sld>
+</file>
+
+<file path=ppt/slides/slide36.xml><?xml version="1.0" encoding="utf-8"?>
 <p:sld xmlns:a="http://schemas.openxmlformats.org/drawingml/2006/main" xmlns:r="http://schemas.openxmlformats.org/officeDocument/2006/relationships" xmlns:p="http://schemas.openxmlformats.org/presentationml/2006/main">
   <p:cSld>
     <p:spTree>
@@ -6490,7 +6862,7 @@
 </p:sld>
 </file>
 
-<file path=ppt/slides/slide34.xml><?xml version="1.0" encoding="utf-8"?>
+<file path=ppt/slides/slide37.xml><?xml version="1.0" encoding="utf-8"?>
 <p:sld xmlns:a="http://schemas.openxmlformats.org/drawingml/2006/main" xmlns:r="http://schemas.openxmlformats.org/officeDocument/2006/relationships" xmlns:p="http://schemas.openxmlformats.org/presentationml/2006/main">
   <p:cSld>
     <p:spTree>
@@ -6714,11 +7086,7 @@
             <a:pPr algn="l"/>
             <a:r>
               <a:rPr lang="en-US" dirty="0" smtClean="0"/>
-              <a:t>1. Install Codex </a:t>
-            </a:r>
-            <a:r>
-              <a:rPr lang="en-US" dirty="0" smtClean="0"/>
-              <a:t>CLI  on Windows</a:t>
+              <a:t>1. Install Codex CLI  on Windows</a:t>
             </a:r>
             <a:endParaRPr lang="en-US" dirty="0"/>
           </a:p>
@@ -6743,13 +7111,7 @@
               <a:rPr lang="en-US" sz="2200" dirty="0" smtClean="0">
                 <a:hlinkClick r:id="rId2"/>
               </a:rPr>
-              <a:t>https://</a:t>
-            </a:r>
-            <a:r>
-              <a:rPr lang="en-US" sz="2200" dirty="0" smtClean="0">
-                <a:hlinkClick r:id="rId2"/>
-              </a:rPr>
-              <a:t>developers.openai.com/codex/cli</a:t>
+              <a:t>https://developers.openai.com/codex/cli</a:t>
             </a:r>
             <a:endParaRPr lang="en-US" sz="2200" dirty="0" smtClean="0"/>
           </a:p>
@@ -6794,7 +7156,6 @@
               <a:rPr lang="en-US" sz="2200" dirty="0" smtClean="0"/>
               <a:t>"</a:t>
             </a:r>
-            <a:endParaRPr lang="en-US" sz="2200" dirty="0" smtClean="0"/>
           </a:p>
           <a:p>
             <a:r>

--- a/Software Engineering Capstone/05.5. Other Coding Agents.pptx
+++ b/Software Engineering Capstone/05.5. Other Coding Agents.pptx
@@ -688,6 +688,88 @@
     </a:lvl9pPr>
   </p:notesStyle>
 </p:notesMaster>
+</file>
+
+<file path=ppt/notesSlides/notesSlide1.xml><?xml version="1.0" encoding="utf-8"?>
+<p:notes xmlns:a="http://schemas.openxmlformats.org/drawingml/2006/main" xmlns:r="http://schemas.openxmlformats.org/officeDocument/2006/relationships" xmlns:p="http://schemas.openxmlformats.org/presentationml/2006/main">
+  <p:cSld>
+    <p:spTree>
+      <p:nvGrpSpPr>
+        <p:cNvPr id="1" name=""/>
+        <p:cNvGrpSpPr/>
+        <p:nvPr/>
+      </p:nvGrpSpPr>
+      <p:grpSpPr>
+        <a:xfrm>
+          <a:off x="0" y="0"/>
+          <a:ext cx="0" cy="0"/>
+          <a:chOff x="0" y="0"/>
+          <a:chExt cx="0" cy="0"/>
+        </a:xfrm>
+      </p:grpSpPr>
+      <p:sp>
+        <p:nvSpPr>
+          <p:cNvPr id="2" name="Slide Image Placeholder 1"/>
+          <p:cNvSpPr>
+            <a:spLocks noGrp="1" noRot="1" noChangeAspect="1"/>
+          </p:cNvSpPr>
+          <p:nvPr>
+            <p:ph type="sldImg"/>
+          </p:nvPr>
+        </p:nvSpPr>
+        <p:spPr/>
+      </p:sp>
+      <p:sp>
+        <p:nvSpPr>
+          <p:cNvPr id="3" name="Notes Placeholder 2"/>
+          <p:cNvSpPr>
+            <a:spLocks noGrp="1"/>
+          </p:cNvSpPr>
+          <p:nvPr>
+            <p:ph type="body" idx="1"/>
+          </p:nvPr>
+        </p:nvSpPr>
+        <p:spPr/>
+        <p:txBody>
+          <a:bodyPr>
+            <a:normAutofit/>
+          </a:bodyPr>
+          <a:lstStyle/>
+          <a:p>
+            <a:endParaRPr lang="en-US" dirty="0"/>
+          </a:p>
+        </p:txBody>
+      </p:sp>
+      <p:sp>
+        <p:nvSpPr>
+          <p:cNvPr id="4" name="Slide Number Placeholder 3"/>
+          <p:cNvSpPr>
+            <a:spLocks noGrp="1"/>
+          </p:cNvSpPr>
+          <p:nvPr>
+            <p:ph type="sldNum" sz="quarter" idx="10"/>
+          </p:nvPr>
+        </p:nvSpPr>
+        <p:spPr/>
+        <p:txBody>
+          <a:bodyPr/>
+          <a:lstStyle/>
+          <a:p>
+            <a:fld id="{427B5DB8-A6FA-4274-AC8A-CA9D03617F69}" type="slidenum">
+              <a:rPr lang="en-US" smtClean="0"/>
+              <a:pPr/>
+              <a:t>11</a:t>
+            </a:fld>
+            <a:endParaRPr lang="en-US"/>
+          </a:p>
+        </p:txBody>
+      </p:sp>
+    </p:spTree>
+  </p:cSld>
+  <p:clrMapOvr>
+    <a:masterClrMapping/>
+  </p:clrMapOvr>
+</p:notes>
 </file>
 
 <file path=ppt/slideLayouts/slideLayout1.xml><?xml version="1.0" encoding="utf-8"?>
@@ -4336,13 +4418,13 @@
           <a:p>
             <a:r>
               <a:rPr lang="en-US" sz="2200" dirty="0" smtClean="0">
-                <a:hlinkClick r:id="rId2"/>
+                <a:hlinkClick r:id="rId3"/>
               </a:rPr>
               <a:t>https://opencode.ai</a:t>
             </a:r>
             <a:r>
               <a:rPr lang="en-US" sz="2200" dirty="0" smtClean="0">
-                <a:hlinkClick r:id="rId2"/>
+                <a:hlinkClick r:id="rId3"/>
               </a:rPr>
               <a:t>/</a:t>
             </a:r>
@@ -4382,41 +4464,57 @@
             <a:endParaRPr lang="en-US" sz="2200" dirty="0" smtClean="0"/>
           </a:p>
           <a:p>
-            <a:r>
-              <a:rPr lang="en-US" sz="2200" dirty="0" err="1" smtClean="0"/>
-              <a:t>nano</a:t>
-            </a:r>
-            <a:r>
-              <a:rPr lang="en-US" sz="2200" dirty="0" smtClean="0"/>
-              <a:t> ~/.</a:t>
-            </a:r>
-            <a:r>
-              <a:rPr lang="en-US" sz="2200" dirty="0" err="1" smtClean="0"/>
-              <a:t>config</a:t>
-            </a:r>
-            <a:r>
-              <a:rPr lang="en-US" sz="2200" dirty="0" smtClean="0"/>
-              <a:t>/</a:t>
-            </a:r>
-            <a:r>
-              <a:rPr lang="en-US" sz="2200" dirty="0" err="1" smtClean="0"/>
-              <a:t>opencode</a:t>
-            </a:r>
-            <a:r>
-              <a:rPr lang="en-US" sz="2200" dirty="0" smtClean="0"/>
-              <a:t>/</a:t>
-            </a:r>
-            <a:r>
-              <a:rPr lang="en-US" sz="2200" dirty="0" err="1" smtClean="0"/>
-              <a:t>opencode.json</a:t>
-            </a:r>
             <a:endParaRPr lang="en-US" sz="2200" dirty="0" smtClean="0"/>
           </a:p>
           <a:p>
             <a:endParaRPr lang="en-US" sz="2200" dirty="0" smtClean="0"/>
           </a:p>
-        </p:txBody>
-      </p:sp>
+          <a:p>
+            <a:endParaRPr lang="en-US" sz="2200" dirty="0" smtClean="0"/>
+          </a:p>
+          <a:p>
+            <a:endParaRPr lang="en-US" sz="2200" dirty="0" smtClean="0"/>
+          </a:p>
+          <a:p>
+            <a:r>
+              <a:rPr lang="en-US" sz="2200" b="1" dirty="0" smtClean="0"/>
+              <a:t># Start a local model.</a:t>
+            </a:r>
+          </a:p>
+        </p:txBody>
+      </p:sp>
+      <p:pic>
+        <p:nvPicPr>
+          <p:cNvPr id="4" name="Picture 2"/>
+          <p:cNvPicPr>
+            <a:picLocks noChangeAspect="1" noChangeArrowheads="1"/>
+          </p:cNvPicPr>
+          <p:nvPr/>
+        </p:nvPicPr>
+        <p:blipFill>
+          <a:blip r:embed="rId4" cstate="print"/>
+          <a:srcRect/>
+          <a:stretch>
+            <a:fillRect/>
+          </a:stretch>
+        </p:blipFill>
+        <p:spPr bwMode="auto">
+          <a:xfrm>
+            <a:off x="1752600" y="3067050"/>
+            <a:ext cx="5514975" cy="1123950"/>
+          </a:xfrm>
+          <a:prstGeom prst="rect">
+            <a:avLst/>
+          </a:prstGeom>
+          <a:noFill/>
+          <a:ln w="9525">
+            <a:noFill/>
+            <a:miter lim="800000"/>
+            <a:headEnd/>
+            <a:tailEnd/>
+          </a:ln>
+        </p:spPr>
+      </p:pic>
     </p:spTree>
   </p:cSld>
   <p:clrMapOvr>
@@ -4460,19 +4558,7 @@
             <a:pPr algn="l"/>
             <a:r>
               <a:rPr lang="en-US" dirty="0" smtClean="0"/>
-              <a:t>1. Install </a:t>
-            </a:r>
-            <a:r>
-              <a:rPr lang="en-US" dirty="0" err="1" smtClean="0"/>
-              <a:t>OpenCode</a:t>
-            </a:r>
-            <a:r>
-              <a:rPr lang="en-US" dirty="0" smtClean="0"/>
-              <a:t> on </a:t>
-            </a:r>
-            <a:r>
-              <a:rPr lang="en-US" dirty="0" err="1" smtClean="0"/>
-              <a:t>macOS</a:t>
+              <a:t>2. Create Configuration File for Using Local Model</a:t>
             </a:r>
             <a:endParaRPr lang="en-US" dirty="0"/>
           </a:p>
@@ -4497,72 +4583,37 @@
               <a:rPr lang="en-US" sz="2200" dirty="0" smtClean="0">
                 <a:hlinkClick r:id="rId2"/>
               </a:rPr>
-              <a:t>https://opencode.ai</a:t>
-            </a:r>
-            <a:r>
-              <a:rPr lang="en-US" sz="2200" dirty="0" smtClean="0">
-                <a:hlinkClick r:id="rId2"/>
-              </a:rPr>
+              <a:t>https://opencode.ai/docs/config/</a:t>
+            </a:r>
+            <a:endParaRPr lang="en-US" sz="2200" dirty="0" smtClean="0"/>
+          </a:p>
+          <a:p>
+            <a:r>
+              <a:rPr lang="en-US" sz="2200" dirty="0" err="1" smtClean="0"/>
+              <a:t>nano</a:t>
+            </a:r>
+            <a:r>
+              <a:rPr lang="en-US" sz="2200" dirty="0" smtClean="0"/>
+              <a:t> </a:t>
+            </a:r>
+            <a:r>
+              <a:rPr lang="en-US" sz="2200" dirty="0" smtClean="0"/>
+              <a:t>~/.</a:t>
+            </a:r>
+            <a:r>
+              <a:rPr lang="en-US" sz="2200" dirty="0" err="1" smtClean="0"/>
+              <a:t>config</a:t>
+            </a:r>
+            <a:r>
+              <a:rPr lang="en-US" sz="2200" dirty="0" smtClean="0"/>
               <a:t>/</a:t>
             </a:r>
-            <a:endParaRPr lang="en-US" sz="2200" dirty="0" smtClean="0"/>
-          </a:p>
-          <a:p>
-            <a:r>
-              <a:rPr lang="en-US" sz="2200" dirty="0" smtClean="0"/>
-              <a:t>curl </a:t>
-            </a:r>
-            <a:r>
-              <a:rPr lang="en-US" sz="2200" dirty="0" smtClean="0"/>
-              <a:t>-</a:t>
-            </a:r>
-            <a:r>
-              <a:rPr lang="en-US" sz="2200" dirty="0" err="1" smtClean="0"/>
-              <a:t>fsSL</a:t>
-            </a:r>
-            <a:r>
-              <a:rPr lang="en-US" sz="2200" dirty="0" smtClean="0"/>
-              <a:t> https://opencode.ai/install | </a:t>
-            </a:r>
-            <a:r>
-              <a:rPr lang="en-US" sz="2200" dirty="0" smtClean="0"/>
-              <a:t>bash</a:t>
-            </a:r>
-          </a:p>
-          <a:p>
             <a:r>
               <a:rPr lang="en-US" sz="2200" dirty="0" err="1" smtClean="0"/>
               <a:t>opencode</a:t>
             </a:r>
             <a:r>
               <a:rPr lang="en-US" sz="2200" dirty="0" smtClean="0"/>
-              <a:t> --version</a:t>
-            </a:r>
-            <a:endParaRPr lang="en-US" sz="2200" dirty="0" smtClean="0"/>
-          </a:p>
-          <a:p>
-            <a:r>
-              <a:rPr lang="en-US" sz="2200" dirty="0" err="1" smtClean="0"/>
-              <a:t>nano</a:t>
-            </a:r>
-            <a:r>
-              <a:rPr lang="en-US" sz="2200" dirty="0" smtClean="0"/>
-              <a:t> ~/.</a:t>
-            </a:r>
-            <a:r>
-              <a:rPr lang="en-US" sz="2200" dirty="0" err="1" smtClean="0"/>
-              <a:t>config</a:t>
-            </a:r>
-            <a:r>
-              <a:rPr lang="en-US" sz="2200" dirty="0" smtClean="0"/>
-              <a:t>/</a:t>
-            </a:r>
-            <a:r>
-              <a:rPr lang="en-US" sz="2200" dirty="0" err="1" smtClean="0"/>
-              <a:t>opencode</a:t>
-            </a:r>
-            <a:r>
-              <a:rPr lang="en-US" sz="2200" dirty="0" smtClean="0"/>
               <a:t>/</a:t>
             </a:r>
             <a:r>
@@ -4573,6 +4624,213 @@
           </a:p>
           <a:p>
             <a:endParaRPr lang="en-US" sz="2200" dirty="0" smtClean="0"/>
+          </a:p>
+          <a:p>
+            <a:endParaRPr lang="en-US" sz="2200" dirty="0" smtClean="0"/>
+          </a:p>
+          <a:p>
+            <a:endParaRPr lang="en-US" sz="2200" dirty="0" smtClean="0"/>
+          </a:p>
+        </p:txBody>
+      </p:sp>
+      <p:sp>
+        <p:nvSpPr>
+          <p:cNvPr id="4" name="Rectangle 3"/>
+          <p:cNvSpPr/>
+          <p:nvPr/>
+        </p:nvSpPr>
+        <p:spPr>
+          <a:xfrm>
+            <a:off x="1066800" y="2755880"/>
+            <a:ext cx="7162800" cy="3416320"/>
+          </a:xfrm>
+          <a:prstGeom prst="rect">
+            <a:avLst/>
+          </a:prstGeom>
+        </p:spPr>
+        <p:style>
+          <a:lnRef idx="2">
+            <a:schemeClr val="dk1"/>
+          </a:lnRef>
+          <a:fillRef idx="1">
+            <a:schemeClr val="lt1"/>
+          </a:fillRef>
+          <a:effectRef idx="0">
+            <a:schemeClr val="dk1"/>
+          </a:effectRef>
+          <a:fontRef idx="minor">
+            <a:schemeClr val="dk1"/>
+          </a:fontRef>
+        </p:style>
+        <p:txBody>
+          <a:bodyPr wrap="square">
+            <a:spAutoFit/>
+          </a:bodyPr>
+          <a:lstStyle/>
+          <a:p>
+            <a:r>
+              <a:rPr lang="en-US" sz="1200" dirty="0" smtClean="0"/>
+              <a:t>{</a:t>
+            </a:r>
+          </a:p>
+          <a:p>
+            <a:r>
+              <a:rPr lang="en-US" sz="1200" dirty="0" smtClean="0"/>
+              <a:t>  "$schema": "https://opencode.ai/config.json",</a:t>
+            </a:r>
+          </a:p>
+          <a:p>
+            <a:r>
+              <a:rPr lang="en-US" sz="1200" dirty="0" smtClean="0"/>
+              <a:t>  "provider": {</a:t>
+            </a:r>
+          </a:p>
+          <a:p>
+            <a:r>
+              <a:rPr lang="en-US" sz="1200" dirty="0" smtClean="0"/>
+              <a:t>    "</a:t>
+            </a:r>
+            <a:r>
+              <a:rPr lang="en-US" sz="1200" dirty="0" err="1" smtClean="0"/>
+              <a:t>ollama</a:t>
+            </a:r>
+            <a:r>
+              <a:rPr lang="en-US" sz="1200" dirty="0" smtClean="0"/>
+              <a:t>": {</a:t>
+            </a:r>
+          </a:p>
+          <a:p>
+            <a:r>
+              <a:rPr lang="en-US" sz="1200" dirty="0" smtClean="0"/>
+              <a:t>      "</a:t>
+            </a:r>
+            <a:r>
+              <a:rPr lang="en-US" sz="1200" dirty="0" err="1" smtClean="0"/>
+              <a:t>npm</a:t>
+            </a:r>
+            <a:r>
+              <a:rPr lang="en-US" sz="1200" dirty="0" smtClean="0"/>
+              <a:t>": "@</a:t>
+            </a:r>
+            <a:r>
+              <a:rPr lang="en-US" sz="1200" dirty="0" err="1" smtClean="0"/>
+              <a:t>ai-sdk</a:t>
+            </a:r>
+            <a:r>
+              <a:rPr lang="en-US" sz="1200" dirty="0" smtClean="0"/>
+              <a:t>/</a:t>
+            </a:r>
+            <a:r>
+              <a:rPr lang="en-US" sz="1200" dirty="0" err="1" smtClean="0"/>
+              <a:t>openai</a:t>
+            </a:r>
+            <a:r>
+              <a:rPr lang="en-US" sz="1200" dirty="0" smtClean="0"/>
+              <a:t>-compatible",</a:t>
+            </a:r>
+          </a:p>
+          <a:p>
+            <a:r>
+              <a:rPr lang="en-US" sz="1200" dirty="0" smtClean="0"/>
+              <a:t>      "name": "</a:t>
+            </a:r>
+            <a:r>
+              <a:rPr lang="en-US" sz="1200" dirty="0" err="1" smtClean="0"/>
+              <a:t>Ollama</a:t>
+            </a:r>
+            <a:r>
+              <a:rPr lang="en-US" sz="1200" dirty="0" smtClean="0"/>
+              <a:t>",</a:t>
+            </a:r>
+          </a:p>
+          <a:p>
+            <a:r>
+              <a:rPr lang="en-US" sz="1200" dirty="0" smtClean="0"/>
+              <a:t>      "options": {</a:t>
+            </a:r>
+          </a:p>
+          <a:p>
+            <a:r>
+              <a:rPr lang="en-US" sz="1200" dirty="0" smtClean="0"/>
+              <a:t>        "</a:t>
+            </a:r>
+            <a:r>
+              <a:rPr lang="en-US" sz="1200" dirty="0" err="1" smtClean="0"/>
+              <a:t>baseURL</a:t>
+            </a:r>
+            <a:r>
+              <a:rPr lang="en-US" sz="1200" dirty="0" smtClean="0"/>
+              <a:t>": "http://localhost:11434/v1"</a:t>
+            </a:r>
+          </a:p>
+          <a:p>
+            <a:r>
+              <a:rPr lang="en-US" sz="1200" dirty="0" smtClean="0"/>
+              <a:t>      },</a:t>
+            </a:r>
+          </a:p>
+          <a:p>
+            <a:r>
+              <a:rPr lang="en-US" sz="1200" dirty="0" smtClean="0"/>
+              <a:t>      "models": {</a:t>
+            </a:r>
+          </a:p>
+          <a:p>
+            <a:r>
+              <a:rPr lang="en-US" sz="1200" dirty="0" smtClean="0"/>
+              <a:t>        "qwen3.6": {</a:t>
+            </a:r>
+          </a:p>
+          <a:p>
+            <a:r>
+              <a:rPr lang="en-US" sz="1200" dirty="0" smtClean="0"/>
+              <a:t>          "name": "qwen3.6"</a:t>
+            </a:r>
+          </a:p>
+          <a:p>
+            <a:r>
+              <a:rPr lang="en-US" sz="1200" dirty="0" smtClean="0"/>
+              <a:t>        }</a:t>
+            </a:r>
+          </a:p>
+          <a:p>
+            <a:r>
+              <a:rPr lang="en-US" sz="1200" dirty="0" smtClean="0"/>
+              <a:t>      }</a:t>
+            </a:r>
+          </a:p>
+          <a:p>
+            <a:r>
+              <a:rPr lang="en-US" sz="1200" dirty="0" smtClean="0"/>
+              <a:t>    }</a:t>
+            </a:r>
+          </a:p>
+          <a:p>
+            <a:r>
+              <a:rPr lang="en-US" sz="1200" dirty="0" smtClean="0"/>
+              <a:t>  },</a:t>
+            </a:r>
+          </a:p>
+          <a:p>
+            <a:r>
+              <a:rPr lang="en-US" sz="1200" dirty="0" smtClean="0"/>
+              <a:t>  "model": "</a:t>
+            </a:r>
+            <a:r>
+              <a:rPr lang="en-US" sz="1200" dirty="0" err="1" smtClean="0"/>
+              <a:t>ollama</a:t>
+            </a:r>
+            <a:r>
+              <a:rPr lang="en-US" sz="1200" dirty="0" smtClean="0"/>
+              <a:t>/qwen3.6"</a:t>
+            </a:r>
+          </a:p>
+          <a:p>
+            <a:r>
+              <a:rPr lang="en-US" sz="1200" dirty="0" smtClean="0"/>
+              <a:t>}</a:t>
+            </a:r>
+            <a:endParaRPr lang="en-US" sz="1200" dirty="0"/>
           </a:p>
         </p:txBody>
       </p:sp>

--- a/Software Engineering Capstone/05.5. Other Coding Agents.pptx
+++ b/Software Engineering Capstone/05.5. Other Coding Agents.pptx
@@ -5,10 +5,10 @@
     <p:sldMasterId id="2147483708" r:id="rId1"/>
   </p:sldMasterIdLst>
   <p:notesMasterIdLst>
-    <p:notesMasterId r:id="rId39"/>
+    <p:notesMasterId r:id="rId41"/>
   </p:notesMasterIdLst>
   <p:handoutMasterIdLst>
-    <p:handoutMasterId r:id="rId40"/>
+    <p:handoutMasterId r:id="rId42"/>
   </p:handoutMasterIdLst>
   <p:sldIdLst>
     <p:sldId id="256" r:id="rId2"/>
@@ -23,31 +23,33 @@
     <p:sldId id="557" r:id="rId11"/>
     <p:sldId id="601" r:id="rId12"/>
     <p:sldId id="602" r:id="rId13"/>
-    <p:sldId id="600" r:id="rId14"/>
-    <p:sldId id="569" r:id="rId15"/>
-    <p:sldId id="596" r:id="rId16"/>
-    <p:sldId id="594" r:id="rId17"/>
-    <p:sldId id="595" r:id="rId18"/>
-    <p:sldId id="578" r:id="rId19"/>
-    <p:sldId id="544" r:id="rId20"/>
-    <p:sldId id="546" r:id="rId21"/>
-    <p:sldId id="545" r:id="rId22"/>
-    <p:sldId id="547" r:id="rId23"/>
-    <p:sldId id="523" r:id="rId24"/>
-    <p:sldId id="535" r:id="rId25"/>
-    <p:sldId id="538" r:id="rId26"/>
-    <p:sldId id="536" r:id="rId27"/>
-    <p:sldId id="537" r:id="rId28"/>
-    <p:sldId id="542" r:id="rId29"/>
-    <p:sldId id="524" r:id="rId30"/>
-    <p:sldId id="567" r:id="rId31"/>
-    <p:sldId id="572" r:id="rId32"/>
-    <p:sldId id="519" r:id="rId33"/>
-    <p:sldId id="521" r:id="rId34"/>
-    <p:sldId id="522" r:id="rId35"/>
-    <p:sldId id="512" r:id="rId36"/>
-    <p:sldId id="513" r:id="rId37"/>
-    <p:sldId id="343" r:id="rId38"/>
+    <p:sldId id="603" r:id="rId14"/>
+    <p:sldId id="604" r:id="rId15"/>
+    <p:sldId id="600" r:id="rId16"/>
+    <p:sldId id="569" r:id="rId17"/>
+    <p:sldId id="596" r:id="rId18"/>
+    <p:sldId id="594" r:id="rId19"/>
+    <p:sldId id="595" r:id="rId20"/>
+    <p:sldId id="578" r:id="rId21"/>
+    <p:sldId id="544" r:id="rId22"/>
+    <p:sldId id="546" r:id="rId23"/>
+    <p:sldId id="545" r:id="rId24"/>
+    <p:sldId id="547" r:id="rId25"/>
+    <p:sldId id="523" r:id="rId26"/>
+    <p:sldId id="535" r:id="rId27"/>
+    <p:sldId id="538" r:id="rId28"/>
+    <p:sldId id="536" r:id="rId29"/>
+    <p:sldId id="537" r:id="rId30"/>
+    <p:sldId id="542" r:id="rId31"/>
+    <p:sldId id="524" r:id="rId32"/>
+    <p:sldId id="567" r:id="rId33"/>
+    <p:sldId id="572" r:id="rId34"/>
+    <p:sldId id="519" r:id="rId35"/>
+    <p:sldId id="521" r:id="rId36"/>
+    <p:sldId id="522" r:id="rId37"/>
+    <p:sldId id="512" r:id="rId38"/>
+    <p:sldId id="513" r:id="rId39"/>
+    <p:sldId id="343" r:id="rId40"/>
   </p:sldIdLst>
   <p:sldSz cx="9144000" cy="6858000" type="screen4x3"/>
   <p:notesSz cx="6858000" cy="9144000"/>
@@ -4688,11 +4690,15 @@
           <a:p>
             <a:r>
               <a:rPr lang="en-US" sz="1200" dirty="0" smtClean="0"/>
-              <a:t>    "</a:t>
+              <a:t>    </a:t>
+            </a:r>
+            <a:r>
+              <a:rPr lang="en-US" sz="1200" dirty="0" smtClean="0"/>
+              <a:t>"</a:t>
             </a:r>
             <a:r>
               <a:rPr lang="en-US" sz="1200" dirty="0" err="1" smtClean="0"/>
-              <a:t>ollama</a:t>
+              <a:t>local_ollama</a:t>
             </a:r>
             <a:r>
               <a:rPr lang="en-US" sz="1200" dirty="0" smtClean="0"/>
@@ -4843,6 +4849,550 @@
 </file>
 
 <file path=ppt/slides/slide13.xml><?xml version="1.0" encoding="utf-8"?>
+<p:sld xmlns:a="http://schemas.openxmlformats.org/drawingml/2006/main" xmlns:r="http://schemas.openxmlformats.org/officeDocument/2006/relationships" xmlns:p="http://schemas.openxmlformats.org/presentationml/2006/main">
+  <p:cSld>
+    <p:spTree>
+      <p:nvGrpSpPr>
+        <p:cNvPr id="1" name=""/>
+        <p:cNvGrpSpPr/>
+        <p:nvPr/>
+      </p:nvGrpSpPr>
+      <p:grpSpPr>
+        <a:xfrm>
+          <a:off x="0" y="0"/>
+          <a:ext cx="0" cy="0"/>
+          <a:chOff x="0" y="0"/>
+          <a:chExt cx="0" cy="0"/>
+        </a:xfrm>
+      </p:grpSpPr>
+      <p:sp>
+        <p:nvSpPr>
+          <p:cNvPr id="2" name="Title 1"/>
+          <p:cNvSpPr>
+            <a:spLocks noGrp="1"/>
+          </p:cNvSpPr>
+          <p:nvPr>
+            <p:ph type="title"/>
+          </p:nvPr>
+        </p:nvSpPr>
+        <p:spPr/>
+        <p:txBody>
+          <a:bodyPr/>
+          <a:lstStyle/>
+          <a:p>
+            <a:pPr algn="l"/>
+            <a:r>
+              <a:rPr lang="en-US" dirty="0" smtClean="0"/>
+              <a:t>3. Create Configuration File for Using Remote Model</a:t>
+            </a:r>
+            <a:endParaRPr lang="en-US" dirty="0"/>
+          </a:p>
+        </p:txBody>
+      </p:sp>
+      <p:sp>
+        <p:nvSpPr>
+          <p:cNvPr id="3" name="Content Placeholder 2"/>
+          <p:cNvSpPr>
+            <a:spLocks noGrp="1"/>
+          </p:cNvSpPr>
+          <p:nvPr>
+            <p:ph idx="1"/>
+          </p:nvPr>
+        </p:nvSpPr>
+        <p:spPr/>
+        <p:txBody>
+          <a:bodyPr/>
+          <a:lstStyle/>
+          <a:p>
+            <a:r>
+              <a:rPr lang="en-US" sz="2000" dirty="0" smtClean="0">
+                <a:hlinkClick r:id="rId2"/>
+              </a:rPr>
+              <a:t>https://opencode.ai/docs/config/</a:t>
+            </a:r>
+            <a:endParaRPr lang="en-US" sz="2000" dirty="0" smtClean="0"/>
+          </a:p>
+          <a:p>
+            <a:r>
+              <a:rPr lang="en-US" sz="2000" dirty="0" err="1" smtClean="0"/>
+              <a:t>nano</a:t>
+            </a:r>
+            <a:r>
+              <a:rPr lang="en-US" sz="2000" dirty="0" smtClean="0"/>
+              <a:t> </a:t>
+            </a:r>
+            <a:r>
+              <a:rPr lang="en-US" sz="2000" dirty="0" smtClean="0"/>
+              <a:t>~/.</a:t>
+            </a:r>
+            <a:r>
+              <a:rPr lang="en-US" sz="2000" dirty="0" err="1" smtClean="0"/>
+              <a:t>config</a:t>
+            </a:r>
+            <a:r>
+              <a:rPr lang="en-US" sz="2000" dirty="0" smtClean="0"/>
+              <a:t>/</a:t>
+            </a:r>
+            <a:r>
+              <a:rPr lang="en-US" sz="2000" dirty="0" err="1" smtClean="0"/>
+              <a:t>opencode</a:t>
+            </a:r>
+            <a:r>
+              <a:rPr lang="en-US" sz="2000" dirty="0" smtClean="0"/>
+              <a:t>/</a:t>
+            </a:r>
+            <a:r>
+              <a:rPr lang="en-US" sz="2000" dirty="0" err="1" smtClean="0"/>
+              <a:t>opencode.json</a:t>
+            </a:r>
+            <a:endParaRPr lang="en-US" sz="2000" dirty="0" smtClean="0"/>
+          </a:p>
+          <a:p>
+            <a:r>
+              <a:rPr lang="en-US" sz="2000" dirty="0" smtClean="0"/>
+              <a:t>Claude Code: Read </a:t>
+            </a:r>
+            <a:r>
+              <a:rPr lang="en-US" sz="2000" dirty="0" smtClean="0"/>
+              <a:t>.meta and modify the </a:t>
+            </a:r>
+            <a:r>
+              <a:rPr lang="en-US" sz="2000" dirty="0" err="1" smtClean="0"/>
+              <a:t>OpenCode</a:t>
+            </a:r>
+            <a:r>
+              <a:rPr lang="en-US" sz="2000" dirty="0" smtClean="0"/>
+              <a:t> configuration file to add the model to it</a:t>
+            </a:r>
+            <a:r>
+              <a:rPr lang="en-US" sz="2000" dirty="0" smtClean="0"/>
+              <a:t>.</a:t>
+            </a:r>
+          </a:p>
+          <a:p>
+            <a:endParaRPr lang="en-US" sz="2000" dirty="0" smtClean="0"/>
+          </a:p>
+        </p:txBody>
+      </p:sp>
+      <p:sp>
+        <p:nvSpPr>
+          <p:cNvPr id="4" name="Rectangle 3"/>
+          <p:cNvSpPr/>
+          <p:nvPr/>
+        </p:nvSpPr>
+        <p:spPr>
+          <a:xfrm>
+            <a:off x="1066800" y="3352800"/>
+            <a:ext cx="7162800" cy="2800767"/>
+          </a:xfrm>
+          <a:prstGeom prst="rect">
+            <a:avLst/>
+          </a:prstGeom>
+        </p:spPr>
+        <p:style>
+          <a:lnRef idx="2">
+            <a:schemeClr val="dk1"/>
+          </a:lnRef>
+          <a:fillRef idx="1">
+            <a:schemeClr val="lt1"/>
+          </a:fillRef>
+          <a:effectRef idx="0">
+            <a:schemeClr val="dk1"/>
+          </a:effectRef>
+          <a:fontRef idx="minor">
+            <a:schemeClr val="dk1"/>
+          </a:fontRef>
+        </p:style>
+        <p:txBody>
+          <a:bodyPr wrap="square">
+            <a:spAutoFit/>
+          </a:bodyPr>
+          <a:lstStyle/>
+          <a:p>
+            <a:r>
+              <a:rPr lang="en-US" sz="800" dirty="0" smtClean="0"/>
+              <a:t>{</a:t>
+            </a:r>
+          </a:p>
+          <a:p>
+            <a:r>
+              <a:rPr lang="en-US" sz="800" dirty="0" smtClean="0"/>
+              <a:t>  "$schema": "https://opencode.ai/config.json",</a:t>
+            </a:r>
+          </a:p>
+          <a:p>
+            <a:r>
+              <a:rPr lang="en-US" sz="800" dirty="0" smtClean="0"/>
+              <a:t>  "provider": {</a:t>
+            </a:r>
+          </a:p>
+          <a:p>
+            <a:r>
+              <a:rPr lang="en-US" sz="800" dirty="0" smtClean="0"/>
+              <a:t>    "</a:t>
+            </a:r>
+            <a:r>
+              <a:rPr lang="en-US" sz="800" dirty="0" err="1" smtClean="0"/>
+              <a:t>local_ollama</a:t>
+            </a:r>
+            <a:r>
+              <a:rPr lang="en-US" sz="800" dirty="0" smtClean="0"/>
+              <a:t>": {</a:t>
+            </a:r>
+          </a:p>
+          <a:p>
+            <a:r>
+              <a:rPr lang="en-US" sz="800" dirty="0" smtClean="0"/>
+              <a:t>...</a:t>
+            </a:r>
+          </a:p>
+          <a:p>
+            <a:r>
+              <a:rPr lang="en-US" sz="800" dirty="0" smtClean="0"/>
+              <a:t>    },</a:t>
+            </a:r>
+          </a:p>
+          <a:p>
+            <a:r>
+              <a:rPr lang="en-US" sz="800" dirty="0" smtClean="0"/>
+              <a:t>    "</a:t>
+            </a:r>
+            <a:r>
+              <a:rPr lang="en-US" sz="800" dirty="0" err="1" smtClean="0"/>
+              <a:t>remote_ollama</a:t>
+            </a:r>
+            <a:r>
+              <a:rPr lang="en-US" sz="800" dirty="0" smtClean="0"/>
+              <a:t>": {</a:t>
+            </a:r>
+          </a:p>
+          <a:p>
+            <a:r>
+              <a:rPr lang="en-US" sz="800" dirty="0" smtClean="0"/>
+              <a:t>      "</a:t>
+            </a:r>
+            <a:r>
+              <a:rPr lang="en-US" sz="800" dirty="0" err="1" smtClean="0"/>
+              <a:t>npm</a:t>
+            </a:r>
+            <a:r>
+              <a:rPr lang="en-US" sz="800" dirty="0" smtClean="0"/>
+              <a:t>": "@</a:t>
+            </a:r>
+            <a:r>
+              <a:rPr lang="en-US" sz="800" dirty="0" err="1" smtClean="0"/>
+              <a:t>ai-sdk</a:t>
+            </a:r>
+            <a:r>
+              <a:rPr lang="en-US" sz="800" dirty="0" smtClean="0"/>
+              <a:t>/</a:t>
+            </a:r>
+            <a:r>
+              <a:rPr lang="en-US" sz="800" dirty="0" err="1" smtClean="0"/>
+              <a:t>openai</a:t>
+            </a:r>
+            <a:r>
+              <a:rPr lang="en-US" sz="800" dirty="0" smtClean="0"/>
+              <a:t>-compatible",</a:t>
+            </a:r>
+          </a:p>
+          <a:p>
+            <a:r>
+              <a:rPr lang="en-US" sz="800" dirty="0" smtClean="0"/>
+              <a:t>      "name": "FIT HCMUS",</a:t>
+            </a:r>
+          </a:p>
+          <a:p>
+            <a:r>
+              <a:rPr lang="en-US" sz="800" dirty="0" smtClean="0"/>
+              <a:t>      "options": {</a:t>
+            </a:r>
+          </a:p>
+          <a:p>
+            <a:r>
+              <a:rPr lang="en-US" sz="800" dirty="0" smtClean="0"/>
+              <a:t>        "</a:t>
+            </a:r>
+            <a:r>
+              <a:rPr lang="en-US" sz="800" dirty="0" err="1" smtClean="0"/>
+              <a:t>baseURL</a:t>
+            </a:r>
+            <a:r>
+              <a:rPr lang="en-US" sz="800" dirty="0" smtClean="0"/>
+              <a:t>": "https://remote_ollama.example.com/api",</a:t>
+            </a:r>
+          </a:p>
+          <a:p>
+            <a:r>
+              <a:rPr lang="en-US" sz="800" dirty="0" smtClean="0"/>
+              <a:t>        "</a:t>
+            </a:r>
+            <a:r>
+              <a:rPr lang="en-US" sz="800" dirty="0" err="1" smtClean="0"/>
+              <a:t>apiKey</a:t>
+            </a:r>
+            <a:r>
+              <a:rPr lang="en-US" sz="800" dirty="0" smtClean="0"/>
+              <a:t>": "sk-95af...71b9"</a:t>
+            </a:r>
+          </a:p>
+          <a:p>
+            <a:r>
+              <a:rPr lang="en-US" sz="800" dirty="0" smtClean="0"/>
+              <a:t>      },</a:t>
+            </a:r>
+          </a:p>
+          <a:p>
+            <a:r>
+              <a:rPr lang="en-US" sz="800" dirty="0" smtClean="0"/>
+              <a:t>      "models": {</a:t>
+            </a:r>
+          </a:p>
+          <a:p>
+            <a:r>
+              <a:rPr lang="en-US" sz="800" dirty="0" smtClean="0"/>
+              <a:t>        "Qwen3.6-27B": {</a:t>
+            </a:r>
+          </a:p>
+          <a:p>
+            <a:r>
+              <a:rPr lang="en-US" sz="800" dirty="0" smtClean="0"/>
+              <a:t>          "name": "Qwen3.6-27B"</a:t>
+            </a:r>
+          </a:p>
+          <a:p>
+            <a:r>
+              <a:rPr lang="en-US" sz="800" dirty="0" smtClean="0"/>
+              <a:t>        }</a:t>
+            </a:r>
+          </a:p>
+          <a:p>
+            <a:r>
+              <a:rPr lang="en-US" sz="800" dirty="0" smtClean="0"/>
+              <a:t>      }</a:t>
+            </a:r>
+          </a:p>
+          <a:p>
+            <a:r>
+              <a:rPr lang="en-US" sz="800" dirty="0" smtClean="0"/>
+              <a:t>    }</a:t>
+            </a:r>
+          </a:p>
+          <a:p>
+            <a:r>
+              <a:rPr lang="en-US" sz="800" dirty="0" smtClean="0"/>
+              <a:t>  },</a:t>
+            </a:r>
+          </a:p>
+          <a:p>
+            <a:r>
+              <a:rPr lang="en-US" sz="800" dirty="0" smtClean="0"/>
+              <a:t>  "model": "</a:t>
+            </a:r>
+            <a:r>
+              <a:rPr lang="en-US" sz="800" dirty="0" err="1" smtClean="0"/>
+              <a:t>remote_ollama</a:t>
+            </a:r>
+            <a:r>
+              <a:rPr lang="en-US" sz="800" dirty="0" smtClean="0"/>
+              <a:t>/Qwen3.6-27B"</a:t>
+            </a:r>
+          </a:p>
+          <a:p>
+            <a:r>
+              <a:rPr lang="en-US" sz="800" dirty="0" smtClean="0"/>
+              <a:t>}</a:t>
+            </a:r>
+          </a:p>
+        </p:txBody>
+      </p:sp>
+    </p:spTree>
+  </p:cSld>
+  <p:clrMapOvr>
+    <a:masterClrMapping/>
+  </p:clrMapOvr>
+</p:sld>
+</file>
+
+<file path=ppt/slides/slide14.xml><?xml version="1.0" encoding="utf-8"?>
+<p:sld xmlns:a="http://schemas.openxmlformats.org/drawingml/2006/main" xmlns:r="http://schemas.openxmlformats.org/officeDocument/2006/relationships" xmlns:p="http://schemas.openxmlformats.org/presentationml/2006/main">
+  <p:cSld>
+    <p:spTree>
+      <p:nvGrpSpPr>
+        <p:cNvPr id="1" name=""/>
+        <p:cNvGrpSpPr/>
+        <p:nvPr/>
+      </p:nvGrpSpPr>
+      <p:grpSpPr>
+        <a:xfrm>
+          <a:off x="0" y="0"/>
+          <a:ext cx="0" cy="0"/>
+          <a:chOff x="0" y="0"/>
+          <a:chExt cx="0" cy="0"/>
+        </a:xfrm>
+      </p:grpSpPr>
+      <p:sp>
+        <p:nvSpPr>
+          <p:cNvPr id="2" name="Title 1"/>
+          <p:cNvSpPr>
+            <a:spLocks noGrp="1"/>
+          </p:cNvSpPr>
+          <p:nvPr>
+            <p:ph type="title"/>
+          </p:nvPr>
+        </p:nvSpPr>
+        <p:spPr/>
+        <p:txBody>
+          <a:bodyPr/>
+          <a:lstStyle/>
+          <a:p>
+            <a:pPr algn="l"/>
+            <a:r>
+              <a:rPr lang="en-US" dirty="0" smtClean="0"/>
+              <a:t>4. </a:t>
+            </a:r>
+            <a:r>
+              <a:rPr lang="en-US" dirty="0" smtClean="0"/>
+              <a:t>Open </a:t>
+            </a:r>
+            <a:r>
+              <a:rPr lang="en-US" dirty="0" err="1" smtClean="0"/>
+              <a:t>OpenCode</a:t>
+            </a:r>
+            <a:endParaRPr lang="en-US" dirty="0"/>
+          </a:p>
+        </p:txBody>
+      </p:sp>
+      <p:sp>
+        <p:nvSpPr>
+          <p:cNvPr id="3" name="Content Placeholder 2"/>
+          <p:cNvSpPr>
+            <a:spLocks noGrp="1"/>
+          </p:cNvSpPr>
+          <p:nvPr>
+            <p:ph idx="1"/>
+          </p:nvPr>
+        </p:nvSpPr>
+        <p:spPr/>
+        <p:txBody>
+          <a:bodyPr/>
+          <a:lstStyle/>
+          <a:p>
+            <a:r>
+              <a:rPr lang="en-US" sz="1200" b="1" dirty="0" smtClean="0"/>
+              <a:t>Create a prototype for an Inventory Management System with the following </a:t>
+            </a:r>
+            <a:r>
+              <a:rPr lang="en-US" sz="1200" b="1" dirty="0" smtClean="0"/>
+              <a:t>PRD:</a:t>
+            </a:r>
+          </a:p>
+          <a:p>
+            <a:endParaRPr lang="en-US" sz="1200" dirty="0" smtClean="0"/>
+          </a:p>
+          <a:p>
+            <a:r>
+              <a:rPr lang="en-US" sz="1200" dirty="0" smtClean="0"/>
+              <a:t>Inventory Management System</a:t>
+            </a:r>
+          </a:p>
+          <a:p>
+            <a:endParaRPr lang="en-US" sz="1200" dirty="0" smtClean="0"/>
+          </a:p>
+          <a:p>
+            <a:r>
+              <a:rPr lang="en-US" sz="1200" dirty="0" smtClean="0"/>
+              <a:t>A </a:t>
+            </a:r>
+            <a:r>
+              <a:rPr lang="en-US" sz="1200" dirty="0" smtClean="0"/>
+              <a:t>comprehensive, FDA-compliant lot tracking inventory system for pharmaceutical and laboratory environments.</a:t>
+            </a:r>
+          </a:p>
+          <a:p>
+            <a:endParaRPr lang="en-US" sz="1200" dirty="0" smtClean="0"/>
+          </a:p>
+          <a:p>
+            <a:r>
+              <a:rPr lang="en-US" sz="1200" dirty="0" smtClean="0"/>
+              <a:t>## 🚀 Features</a:t>
+            </a:r>
+          </a:p>
+          <a:p>
+            <a:endParaRPr lang="en-US" sz="1200" dirty="0" smtClean="0"/>
+          </a:p>
+          <a:p>
+            <a:r>
+              <a:rPr lang="en-US" sz="1200" dirty="0" smtClean="0"/>
+              <a:t>### Core Functionality</a:t>
+            </a:r>
+          </a:p>
+          <a:p>
+            <a:r>
+              <a:rPr lang="en-US" sz="1200" dirty="0" smtClean="0"/>
+              <a:t>- **Material Master Data Management** - Centralized material information with TG part numbers</a:t>
+            </a:r>
+          </a:p>
+          <a:p>
+            <a:r>
+              <a:rPr lang="en-US" sz="1200" dirty="0" smtClean="0"/>
+              <a:t>- **Lot Tracking &amp; Control** - Complete traceability from receipt to usage</a:t>
+            </a:r>
+          </a:p>
+          <a:p>
+            <a:r>
+              <a:rPr lang="en-US" sz="1200" dirty="0" smtClean="0"/>
+              <a:t>- **Production Batch Management** - Track production batches with full genealogy</a:t>
+            </a:r>
+          </a:p>
+          <a:p>
+            <a:r>
+              <a:rPr lang="en-US" sz="1200" dirty="0" smtClean="0"/>
+              <a:t>- **Quality Control Integration** - QC testing and acceptance workflows</a:t>
+            </a:r>
+          </a:p>
+          <a:p>
+            <a:r>
+              <a:rPr lang="en-US" sz="1200" dirty="0" smtClean="0"/>
+              <a:t>- **Label Generation &amp; Printing** - Barcode labels for materials and samples</a:t>
+            </a:r>
+          </a:p>
+          <a:p>
+            <a:r>
+              <a:rPr lang="en-US" sz="1200" dirty="0" smtClean="0"/>
+              <a:t>- **Comprehensive Reporting** - Advanced reporting with caching and scheduling</a:t>
+            </a:r>
+          </a:p>
+          <a:p>
+            <a:endParaRPr lang="en-US" sz="1200" dirty="0" smtClean="0"/>
+          </a:p>
+          <a:p>
+            <a:r>
+              <a:rPr lang="en-US" sz="1200" dirty="0" smtClean="0"/>
+              <a:t>----------</a:t>
+            </a:r>
+          </a:p>
+          <a:p>
+            <a:endParaRPr lang="en-US" sz="1200" dirty="0" smtClean="0"/>
+          </a:p>
+          <a:p>
+            <a:r>
+              <a:rPr lang="en-US" sz="1200" b="1" dirty="0" smtClean="0"/>
+              <a:t>Choose the default options for all the questions.</a:t>
+            </a:r>
+            <a:endParaRPr lang="en-US" sz="1200" b="1" dirty="0"/>
+          </a:p>
+        </p:txBody>
+      </p:sp>
+    </p:spTree>
+  </p:cSld>
+  <p:clrMapOvr>
+    <a:masterClrMapping/>
+  </p:clrMapOvr>
+</p:sld>
+</file>
+
+<file path=ppt/slides/slide15.xml><?xml version="1.0" encoding="utf-8"?>
 <p:sld xmlns:a="http://schemas.openxmlformats.org/drawingml/2006/main" xmlns:r="http://schemas.openxmlformats.org/officeDocument/2006/relationships" xmlns:p="http://schemas.openxmlformats.org/presentationml/2006/main">
   <p:cSld>
     <p:spTree>
@@ -4893,7 +5443,7 @@
 </p:sld>
 </file>
 
-<file path=ppt/slides/slide14.xml><?xml version="1.0" encoding="utf-8"?>
+<file path=ppt/slides/slide16.xml><?xml version="1.0" encoding="utf-8"?>
 <p:sld xmlns:a="http://schemas.openxmlformats.org/drawingml/2006/main" xmlns:r="http://schemas.openxmlformats.org/officeDocument/2006/relationships" xmlns:p="http://schemas.openxmlformats.org/presentationml/2006/main">
   <p:cSld>
     <p:spTree>
@@ -5002,7 +5552,7 @@
 </p:sld>
 </file>
 
-<file path=ppt/slides/slide15.xml><?xml version="1.0" encoding="utf-8"?>
+<file path=ppt/slides/slide17.xml><?xml version="1.0" encoding="utf-8"?>
 <p:sld xmlns:a="http://schemas.openxmlformats.org/drawingml/2006/main" xmlns:r="http://schemas.openxmlformats.org/officeDocument/2006/relationships" xmlns:p="http://schemas.openxmlformats.org/presentationml/2006/main">
   <p:cSld>
     <p:spTree>
@@ -5085,186 +5635,6 @@
           <a:xfrm>
             <a:off x="762000" y="2514600"/>
             <a:ext cx="7653020" cy="3048000"/>
-          </a:xfrm>
-          <a:prstGeom prst="rect">
-            <a:avLst/>
-          </a:prstGeom>
-          <a:noFill/>
-          <a:ln w="9525">
-            <a:noFill/>
-            <a:miter lim="800000"/>
-            <a:headEnd/>
-            <a:tailEnd/>
-          </a:ln>
-        </p:spPr>
-      </p:pic>
-    </p:spTree>
-  </p:cSld>
-  <p:clrMapOvr>
-    <a:masterClrMapping/>
-  </p:clrMapOvr>
-</p:sld>
-</file>
-
-<file path=ppt/slides/slide16.xml><?xml version="1.0" encoding="utf-8"?>
-<p:sld xmlns:a="http://schemas.openxmlformats.org/drawingml/2006/main" xmlns:r="http://schemas.openxmlformats.org/officeDocument/2006/relationships" xmlns:p="http://schemas.openxmlformats.org/presentationml/2006/main">
-  <p:cSld>
-    <p:spTree>
-      <p:nvGrpSpPr>
-        <p:cNvPr id="1" name=""/>
-        <p:cNvGrpSpPr/>
-        <p:nvPr/>
-      </p:nvGrpSpPr>
-      <p:grpSpPr>
-        <a:xfrm>
-          <a:off x="0" y="0"/>
-          <a:ext cx="0" cy="0"/>
-          <a:chOff x="0" y="0"/>
-          <a:chExt cx="0" cy="0"/>
-        </a:xfrm>
-      </p:grpSpPr>
-      <p:pic>
-        <p:nvPicPr>
-          <p:cNvPr id="4" name="Picture 2" descr="https://lh3.ggpht.com/1IfZLL2QDSjZ0wS7sUhaMlsAOS8BBzdR3wZ1WawgRn7KZAM8nEVZYMOUM-lqQb0ikIzp=w300"/>
-          <p:cNvPicPr>
-            <a:picLocks noChangeAspect="1" noChangeArrowheads="1"/>
-          </p:cNvPicPr>
-          <p:nvPr/>
-        </p:nvPicPr>
-        <p:blipFill>
-          <a:blip r:embed="rId2" cstate="print"/>
-          <a:srcRect/>
-          <a:stretch>
-            <a:fillRect/>
-          </a:stretch>
-        </p:blipFill>
-        <p:spPr bwMode="auto">
-          <a:xfrm>
-            <a:off x="3276600" y="1905000"/>
-            <a:ext cx="2857500" cy="2857500"/>
-          </a:xfrm>
-          <a:prstGeom prst="rect">
-            <a:avLst/>
-          </a:prstGeom>
-          <a:noFill/>
-        </p:spPr>
-      </p:pic>
-    </p:spTree>
-  </p:cSld>
-  <p:clrMapOvr>
-    <a:masterClrMapping/>
-  </p:clrMapOvr>
-</p:sld>
-</file>
-
-<file path=ppt/slides/slide17.xml><?xml version="1.0" encoding="utf-8"?>
-<p:sld xmlns:a="http://schemas.openxmlformats.org/drawingml/2006/main" xmlns:r="http://schemas.openxmlformats.org/officeDocument/2006/relationships" xmlns:p="http://schemas.openxmlformats.org/presentationml/2006/main">
-  <p:cSld>
-    <p:spTree>
-      <p:nvGrpSpPr>
-        <p:cNvPr id="1" name=""/>
-        <p:cNvGrpSpPr/>
-        <p:nvPr/>
-      </p:nvGrpSpPr>
-      <p:grpSpPr>
-        <a:xfrm>
-          <a:off x="0" y="0"/>
-          <a:ext cx="0" cy="0"/>
-          <a:chOff x="0" y="0"/>
-          <a:chExt cx="0" cy="0"/>
-        </a:xfrm>
-      </p:grpSpPr>
-      <p:sp>
-        <p:nvSpPr>
-          <p:cNvPr id="2" name="Title 1"/>
-          <p:cNvSpPr>
-            <a:spLocks noGrp="1"/>
-          </p:cNvSpPr>
-          <p:nvPr>
-            <p:ph type="title"/>
-          </p:nvPr>
-        </p:nvSpPr>
-        <p:spPr/>
-        <p:txBody>
-          <a:bodyPr/>
-          <a:lstStyle/>
-          <a:p>
-            <a:pPr algn="l"/>
-            <a:r>
-              <a:rPr lang="en-US" dirty="0" smtClean="0"/>
-              <a:t>1. Install </a:t>
-            </a:r>
-            <a:r>
-              <a:rPr lang="en-US" dirty="0" err="1" smtClean="0"/>
-              <a:t>Kiro</a:t>
-            </a:r>
-            <a:endParaRPr lang="en-US" dirty="0"/>
-          </a:p>
-        </p:txBody>
-      </p:sp>
-      <p:sp>
-        <p:nvSpPr>
-          <p:cNvPr id="3" name="Content Placeholder 2"/>
-          <p:cNvSpPr>
-            <a:spLocks noGrp="1"/>
-          </p:cNvSpPr>
-          <p:nvPr>
-            <p:ph idx="1"/>
-          </p:nvPr>
-        </p:nvSpPr>
-        <p:spPr/>
-        <p:txBody>
-          <a:bodyPr/>
-          <a:lstStyle/>
-          <a:p>
-            <a:r>
-              <a:rPr lang="en-US" sz="2400" dirty="0" smtClean="0">
-                <a:hlinkClick r:id="rId2"/>
-              </a:rPr>
-              <a:t>https://kiro.dev/</a:t>
-            </a:r>
-            <a:endParaRPr lang="en-US" sz="2400" dirty="0" smtClean="0"/>
-          </a:p>
-          <a:p>
-            <a:r>
-              <a:rPr lang="en-US" sz="2400" dirty="0" err="1" smtClean="0"/>
-              <a:t>Kiro</a:t>
-            </a:r>
-            <a:r>
-              <a:rPr lang="en-US" sz="2400" dirty="0" smtClean="0"/>
-              <a:t> is an </a:t>
-            </a:r>
-            <a:r>
-              <a:rPr lang="en-US" sz="2400" dirty="0" err="1" smtClean="0"/>
-              <a:t>agentic</a:t>
-            </a:r>
-            <a:r>
-              <a:rPr lang="en-US" sz="2400" dirty="0" smtClean="0"/>
-              <a:t> AI integrated development environment that converts natural-language specifications into structured plans, code, documentation, and tests using autonomous AI agents. </a:t>
-            </a:r>
-            <a:endParaRPr lang="en-US" sz="2400" dirty="0"/>
-          </a:p>
-        </p:txBody>
-      </p:sp>
-      <p:pic>
-        <p:nvPicPr>
-          <p:cNvPr id="1026" name="Picture 2"/>
-          <p:cNvPicPr>
-            <a:picLocks noChangeAspect="1" noChangeArrowheads="1"/>
-          </p:cNvPicPr>
-          <p:nvPr/>
-        </p:nvPicPr>
-        <p:blipFill>
-          <a:blip r:embed="rId3" cstate="print"/>
-          <a:srcRect/>
-          <a:stretch>
-            <a:fillRect/>
-          </a:stretch>
-        </p:blipFill>
-        <p:spPr bwMode="auto">
-          <a:xfrm>
-            <a:off x="3048000" y="3581400"/>
-            <a:ext cx="3419475" cy="2636520"/>
           </a:xfrm>
           <a:prstGeom prst="rect">
             <a:avLst/>
@@ -5372,7 +5742,11 @@
             <a:pPr algn="l"/>
             <a:r>
               <a:rPr lang="en-US" dirty="0" smtClean="0"/>
-              <a:t>1. Create a Prototype</a:t>
+              <a:t>1. Install </a:t>
+            </a:r>
+            <a:r>
+              <a:rPr lang="en-US" dirty="0" err="1" smtClean="0"/>
+              <a:t>Kiro</a:t>
             </a:r>
             <a:endParaRPr lang="en-US" dirty="0"/>
           </a:p>
@@ -5394,21 +5768,37 @@
           <a:lstStyle/>
           <a:p>
             <a:r>
-              <a:rPr lang="en-US" dirty="0" smtClean="0">
+              <a:rPr lang="en-US" sz="2400" dirty="0" smtClean="0">
                 <a:hlinkClick r:id="rId2"/>
               </a:rPr>
-              <a:t>https://lovable.dev/</a:t>
-            </a:r>
-            <a:endParaRPr lang="en-US" dirty="0" smtClean="0"/>
-          </a:p>
-          <a:p>
-            <a:endParaRPr lang="en-US" dirty="0"/>
+              <a:t>https://kiro.dev/</a:t>
+            </a:r>
+            <a:endParaRPr lang="en-US" sz="2400" dirty="0" smtClean="0"/>
+          </a:p>
+          <a:p>
+            <a:r>
+              <a:rPr lang="en-US" sz="2400" dirty="0" err="1" smtClean="0"/>
+              <a:t>Kiro</a:t>
+            </a:r>
+            <a:r>
+              <a:rPr lang="en-US" sz="2400" dirty="0" smtClean="0"/>
+              <a:t> is an </a:t>
+            </a:r>
+            <a:r>
+              <a:rPr lang="en-US" sz="2400" dirty="0" err="1" smtClean="0"/>
+              <a:t>agentic</a:t>
+            </a:r>
+            <a:r>
+              <a:rPr lang="en-US" sz="2400" dirty="0" smtClean="0"/>
+              <a:t> AI integrated development environment that converts natural-language specifications into structured plans, code, documentation, and tests using autonomous AI agents. </a:t>
+            </a:r>
+            <a:endParaRPr lang="en-US" sz="2400" dirty="0"/>
           </a:p>
         </p:txBody>
       </p:sp>
       <p:pic>
         <p:nvPicPr>
-          <p:cNvPr id="3074" name="Picture 2"/>
+          <p:cNvPr id="1026" name="Picture 2"/>
           <p:cNvPicPr>
             <a:picLocks noChangeAspect="1" noChangeArrowheads="1"/>
           </p:cNvPicPr>
@@ -5423,8 +5813,8 @@
         </p:blipFill>
         <p:spPr bwMode="auto">
           <a:xfrm>
-            <a:off x="990600" y="2672715"/>
-            <a:ext cx="7225665" cy="3347085"/>
+            <a:off x="3048000" y="3581400"/>
+            <a:ext cx="3419475" cy="2636520"/>
           </a:xfrm>
           <a:prstGeom prst="rect">
             <a:avLst/>
@@ -5579,6 +5969,166 @@
           <a:chExt cx="0" cy="0"/>
         </a:xfrm>
       </p:grpSpPr>
+      <p:pic>
+        <p:nvPicPr>
+          <p:cNvPr id="4" name="Picture 2" descr="https://lh3.ggpht.com/1IfZLL2QDSjZ0wS7sUhaMlsAOS8BBzdR3wZ1WawgRn7KZAM8nEVZYMOUM-lqQb0ikIzp=w300"/>
+          <p:cNvPicPr>
+            <a:picLocks noChangeAspect="1" noChangeArrowheads="1"/>
+          </p:cNvPicPr>
+          <p:nvPr/>
+        </p:nvPicPr>
+        <p:blipFill>
+          <a:blip r:embed="rId2" cstate="print"/>
+          <a:srcRect/>
+          <a:stretch>
+            <a:fillRect/>
+          </a:stretch>
+        </p:blipFill>
+        <p:spPr bwMode="auto">
+          <a:xfrm>
+            <a:off x="3276600" y="1905000"/>
+            <a:ext cx="2857500" cy="2857500"/>
+          </a:xfrm>
+          <a:prstGeom prst="rect">
+            <a:avLst/>
+          </a:prstGeom>
+          <a:noFill/>
+        </p:spPr>
+      </p:pic>
+    </p:spTree>
+  </p:cSld>
+  <p:clrMapOvr>
+    <a:masterClrMapping/>
+  </p:clrMapOvr>
+</p:sld>
+</file>
+
+<file path=ppt/slides/slide21.xml><?xml version="1.0" encoding="utf-8"?>
+<p:sld xmlns:a="http://schemas.openxmlformats.org/drawingml/2006/main" xmlns:r="http://schemas.openxmlformats.org/officeDocument/2006/relationships" xmlns:p="http://schemas.openxmlformats.org/presentationml/2006/main">
+  <p:cSld>
+    <p:spTree>
+      <p:nvGrpSpPr>
+        <p:cNvPr id="1" name=""/>
+        <p:cNvGrpSpPr/>
+        <p:nvPr/>
+      </p:nvGrpSpPr>
+      <p:grpSpPr>
+        <a:xfrm>
+          <a:off x="0" y="0"/>
+          <a:ext cx="0" cy="0"/>
+          <a:chOff x="0" y="0"/>
+          <a:chExt cx="0" cy="0"/>
+        </a:xfrm>
+      </p:grpSpPr>
+      <p:sp>
+        <p:nvSpPr>
+          <p:cNvPr id="2" name="Title 1"/>
+          <p:cNvSpPr>
+            <a:spLocks noGrp="1"/>
+          </p:cNvSpPr>
+          <p:nvPr>
+            <p:ph type="title"/>
+          </p:nvPr>
+        </p:nvSpPr>
+        <p:spPr/>
+        <p:txBody>
+          <a:bodyPr/>
+          <a:lstStyle/>
+          <a:p>
+            <a:pPr algn="l"/>
+            <a:r>
+              <a:rPr lang="en-US" dirty="0" smtClean="0"/>
+              <a:t>1. Create a Prototype</a:t>
+            </a:r>
+            <a:endParaRPr lang="en-US" dirty="0"/>
+          </a:p>
+        </p:txBody>
+      </p:sp>
+      <p:sp>
+        <p:nvSpPr>
+          <p:cNvPr id="3" name="Content Placeholder 2"/>
+          <p:cNvSpPr>
+            <a:spLocks noGrp="1"/>
+          </p:cNvSpPr>
+          <p:nvPr>
+            <p:ph idx="1"/>
+          </p:nvPr>
+        </p:nvSpPr>
+        <p:spPr/>
+        <p:txBody>
+          <a:bodyPr/>
+          <a:lstStyle/>
+          <a:p>
+            <a:r>
+              <a:rPr lang="en-US" dirty="0" smtClean="0">
+                <a:hlinkClick r:id="rId2"/>
+              </a:rPr>
+              <a:t>https://lovable.dev/</a:t>
+            </a:r>
+            <a:endParaRPr lang="en-US" dirty="0" smtClean="0"/>
+          </a:p>
+          <a:p>
+            <a:endParaRPr lang="en-US" dirty="0"/>
+          </a:p>
+        </p:txBody>
+      </p:sp>
+      <p:pic>
+        <p:nvPicPr>
+          <p:cNvPr id="3074" name="Picture 2"/>
+          <p:cNvPicPr>
+            <a:picLocks noChangeAspect="1" noChangeArrowheads="1"/>
+          </p:cNvPicPr>
+          <p:nvPr/>
+        </p:nvPicPr>
+        <p:blipFill>
+          <a:blip r:embed="rId3" cstate="print"/>
+          <a:srcRect/>
+          <a:stretch>
+            <a:fillRect/>
+          </a:stretch>
+        </p:blipFill>
+        <p:spPr bwMode="auto">
+          <a:xfrm>
+            <a:off x="990600" y="2672715"/>
+            <a:ext cx="7225665" cy="3347085"/>
+          </a:xfrm>
+          <a:prstGeom prst="rect">
+            <a:avLst/>
+          </a:prstGeom>
+          <a:noFill/>
+          <a:ln w="9525">
+            <a:noFill/>
+            <a:miter lim="800000"/>
+            <a:headEnd/>
+            <a:tailEnd/>
+          </a:ln>
+        </p:spPr>
+      </p:pic>
+    </p:spTree>
+  </p:cSld>
+  <p:clrMapOvr>
+    <a:masterClrMapping/>
+  </p:clrMapOvr>
+</p:sld>
+</file>
+
+<file path=ppt/slides/slide22.xml><?xml version="1.0" encoding="utf-8"?>
+<p:sld xmlns:a="http://schemas.openxmlformats.org/drawingml/2006/main" xmlns:r="http://schemas.openxmlformats.org/officeDocument/2006/relationships" xmlns:p="http://schemas.openxmlformats.org/presentationml/2006/main">
+  <p:cSld>
+    <p:spTree>
+      <p:nvGrpSpPr>
+        <p:cNvPr id="1" name=""/>
+        <p:cNvGrpSpPr/>
+        <p:nvPr/>
+      </p:nvGrpSpPr>
+      <p:grpSpPr>
+        <a:xfrm>
+          <a:off x="0" y="0"/>
+          <a:ext cx="0" cy="0"/>
+          <a:chOff x="0" y="0"/>
+          <a:chExt cx="0" cy="0"/>
+        </a:xfrm>
+      </p:grpSpPr>
       <p:sp>
         <p:nvSpPr>
           <p:cNvPr id="2" name="Title 1"/>
@@ -5643,7 +6193,7 @@
 </p:sld>
 </file>
 
-<file path=ppt/slides/slide21.xml><?xml version="1.0" encoding="utf-8"?>
+<file path=ppt/slides/slide23.xml><?xml version="1.0" encoding="utf-8"?>
 <p:sld xmlns:a="http://schemas.openxmlformats.org/drawingml/2006/main" xmlns:r="http://schemas.openxmlformats.org/officeDocument/2006/relationships" xmlns:p="http://schemas.openxmlformats.org/presentationml/2006/main">
   <p:cSld>
     <p:spTree>
@@ -5750,7 +6300,7 @@
 </p:sld>
 </file>
 
-<file path=ppt/slides/slide22.xml><?xml version="1.0" encoding="utf-8"?>
+<file path=ppt/slides/slide24.xml><?xml version="1.0" encoding="utf-8"?>
 <p:sld xmlns:a="http://schemas.openxmlformats.org/drawingml/2006/main" xmlns:r="http://schemas.openxmlformats.org/officeDocument/2006/relationships" xmlns:p="http://schemas.openxmlformats.org/presentationml/2006/main">
   <p:cSld>
     <p:spTree>
@@ -5831,7 +6381,7 @@
 </p:sld>
 </file>
 
-<file path=ppt/slides/slide23.xml><?xml version="1.0" encoding="utf-8"?>
+<file path=ppt/slides/slide25.xml><?xml version="1.0" encoding="utf-8"?>
 <p:sld xmlns:a="http://schemas.openxmlformats.org/drawingml/2006/main" xmlns:r="http://schemas.openxmlformats.org/officeDocument/2006/relationships" xmlns:p="http://schemas.openxmlformats.org/presentationml/2006/main">
   <p:cSld>
     <p:spTree>
@@ -5882,7 +6432,7 @@
 </p:sld>
 </file>
 
-<file path=ppt/slides/slide24.xml><?xml version="1.0" encoding="utf-8"?>
+<file path=ppt/slides/slide26.xml><?xml version="1.0" encoding="utf-8"?>
 <p:sld xmlns:a="http://schemas.openxmlformats.org/drawingml/2006/main" xmlns:r="http://schemas.openxmlformats.org/officeDocument/2006/relationships" xmlns:p="http://schemas.openxmlformats.org/presentationml/2006/main">
   <p:cSld>
     <p:spTree>
@@ -5991,7 +6541,7 @@
 </p:sld>
 </file>
 
-<file path=ppt/slides/slide25.xml><?xml version="1.0" encoding="utf-8"?>
+<file path=ppt/slides/slide27.xml><?xml version="1.0" encoding="utf-8"?>
 <p:sld xmlns:a="http://schemas.openxmlformats.org/drawingml/2006/main" xmlns:r="http://schemas.openxmlformats.org/officeDocument/2006/relationships" xmlns:p="http://schemas.openxmlformats.org/presentationml/2006/main">
   <p:cSld>
     <p:spTree>
@@ -6048,7 +6598,11 @@
           <a:p>
             <a:r>
               <a:rPr lang="en-US" sz="1200" b="1" dirty="0" smtClean="0"/>
-              <a:t>Create a prototype for an Inventory Management System with the following PRD:</a:t>
+              <a:t>Create a prototype for an Inventory Management System with the following </a:t>
+            </a:r>
+            <a:r>
+              <a:rPr lang="en-US" sz="1200" b="1" dirty="0" smtClean="0"/>
+              <a:t>PRD:</a:t>
             </a:r>
           </a:p>
           <a:p>
@@ -6066,7 +6620,11 @@
           <a:p>
             <a:r>
               <a:rPr lang="en-US" sz="1200" dirty="0" smtClean="0"/>
-              <a:t>A comprehensive, FDA-compliant lot tracking inventory system for pharmaceutical and laboratory environments.</a:t>
+              <a:t>A </a:t>
+            </a:r>
+            <a:r>
+              <a:rPr lang="en-US" sz="1200" dirty="0" smtClean="0"/>
+              <a:t>comprehensive, FDA-compliant lot tracking inventory system for pharmaceutical and laboratory environments.</a:t>
             </a:r>
           </a:p>
           <a:p>
@@ -6152,7 +6710,7 @@
 </p:sld>
 </file>
 
-<file path=ppt/slides/slide26.xml><?xml version="1.0" encoding="utf-8"?>
+<file path=ppt/slides/slide28.xml><?xml version="1.0" encoding="utf-8"?>
 <p:sld xmlns:a="http://schemas.openxmlformats.org/drawingml/2006/main" xmlns:r="http://schemas.openxmlformats.org/officeDocument/2006/relationships" xmlns:p="http://schemas.openxmlformats.org/presentationml/2006/main">
   <p:cSld>
     <p:spTree>
@@ -6233,7 +6791,7 @@
 </p:sld>
 </file>
 
-<file path=ppt/slides/slide27.xml><?xml version="1.0" encoding="utf-8"?>
+<file path=ppt/slides/slide29.xml><?xml version="1.0" encoding="utf-8"?>
 <p:sld xmlns:a="http://schemas.openxmlformats.org/drawingml/2006/main" xmlns:r="http://schemas.openxmlformats.org/officeDocument/2006/relationships" xmlns:p="http://schemas.openxmlformats.org/presentationml/2006/main">
   <p:cSld>
     <p:spTree>
@@ -6304,159 +6862,6 @@
             <a:headEnd/>
             <a:tailEnd/>
           </a:ln>
-        </p:spPr>
-      </p:pic>
-    </p:spTree>
-  </p:cSld>
-  <p:clrMapOvr>
-    <a:masterClrMapping/>
-  </p:clrMapOvr>
-</p:sld>
-</file>
-
-<file path=ppt/slides/slide28.xml><?xml version="1.0" encoding="utf-8"?>
-<p:sld xmlns:a="http://schemas.openxmlformats.org/drawingml/2006/main" xmlns:r="http://schemas.openxmlformats.org/officeDocument/2006/relationships" xmlns:p="http://schemas.openxmlformats.org/presentationml/2006/main">
-  <p:cSld>
-    <p:spTree>
-      <p:nvGrpSpPr>
-        <p:cNvPr id="1" name=""/>
-        <p:cNvGrpSpPr/>
-        <p:nvPr/>
-      </p:nvGrpSpPr>
-      <p:grpSpPr>
-        <a:xfrm>
-          <a:off x="0" y="0"/>
-          <a:ext cx="0" cy="0"/>
-          <a:chOff x="0" y="0"/>
-          <a:chExt cx="0" cy="0"/>
-        </a:xfrm>
-      </p:grpSpPr>
-      <p:pic>
-        <p:nvPicPr>
-          <p:cNvPr id="4" name="Picture 2" descr="https://lh3.ggpht.com/1IfZLL2QDSjZ0wS7sUhaMlsAOS8BBzdR3wZ1WawgRn7KZAM8nEVZYMOUM-lqQb0ikIzp=w300"/>
-          <p:cNvPicPr>
-            <a:picLocks noChangeAspect="1" noChangeArrowheads="1"/>
-          </p:cNvPicPr>
-          <p:nvPr/>
-        </p:nvPicPr>
-        <p:blipFill>
-          <a:blip r:embed="rId2" cstate="print"/>
-          <a:srcRect/>
-          <a:stretch>
-            <a:fillRect/>
-          </a:stretch>
-        </p:blipFill>
-        <p:spPr bwMode="auto">
-          <a:xfrm>
-            <a:off x="3276600" y="1905000"/>
-            <a:ext cx="2857500" cy="2857500"/>
-          </a:xfrm>
-          <a:prstGeom prst="rect">
-            <a:avLst/>
-          </a:prstGeom>
-          <a:noFill/>
-        </p:spPr>
-      </p:pic>
-    </p:spTree>
-  </p:cSld>
-  <p:clrMapOvr>
-    <a:masterClrMapping/>
-  </p:clrMapOvr>
-</p:sld>
-</file>
-
-<file path=ppt/slides/slide29.xml><?xml version="1.0" encoding="utf-8"?>
-<p:sld xmlns:a="http://schemas.openxmlformats.org/drawingml/2006/main" xmlns:r="http://schemas.openxmlformats.org/officeDocument/2006/relationships" xmlns:p="http://schemas.openxmlformats.org/presentationml/2006/main">
-  <p:cSld>
-    <p:spTree>
-      <p:nvGrpSpPr>
-        <p:cNvPr id="1" name=""/>
-        <p:cNvGrpSpPr/>
-        <p:nvPr/>
-      </p:nvGrpSpPr>
-      <p:grpSpPr>
-        <a:xfrm>
-          <a:off x="0" y="0"/>
-          <a:ext cx="0" cy="0"/>
-          <a:chOff x="0" y="0"/>
-          <a:chExt cx="0" cy="0"/>
-        </a:xfrm>
-      </p:grpSpPr>
-      <p:sp>
-        <p:nvSpPr>
-          <p:cNvPr id="2" name="Title 1"/>
-          <p:cNvSpPr>
-            <a:spLocks noGrp="1"/>
-          </p:cNvSpPr>
-          <p:nvPr>
-            <p:ph type="title"/>
-          </p:nvPr>
-        </p:nvSpPr>
-        <p:spPr/>
-        <p:txBody>
-          <a:bodyPr/>
-          <a:lstStyle/>
-          <a:p>
-            <a:r>
-              <a:rPr lang="en-US" dirty="0" smtClean="0"/>
-              <a:t>Generative UI Tools</a:t>
-            </a:r>
-            <a:endParaRPr lang="en-US" dirty="0"/>
-          </a:p>
-        </p:txBody>
-      </p:sp>
-      <p:sp>
-        <p:nvSpPr>
-          <p:cNvPr id="3" name="Content Placeholder 2"/>
-          <p:cNvSpPr>
-            <a:spLocks noGrp="1"/>
-          </p:cNvSpPr>
-          <p:nvPr>
-            <p:ph idx="1"/>
-          </p:nvPr>
-        </p:nvSpPr>
-        <p:spPr/>
-        <p:txBody>
-          <a:bodyPr/>
-          <a:lstStyle/>
-          <a:p>
-            <a:r>
-              <a:rPr lang="en-US" smtClean="0">
-                <a:hlinkClick r:id="rId2"/>
-              </a:rPr>
-              <a:t>https://v0.dev/</a:t>
-            </a:r>
-            <a:endParaRPr lang="en-US" smtClean="0"/>
-          </a:p>
-          <a:p>
-            <a:endParaRPr lang="en-US"/>
-          </a:p>
-        </p:txBody>
-      </p:sp>
-      <p:pic>
-        <p:nvPicPr>
-          <p:cNvPr id="2050" name="Picture 2" descr="https://cdn3d.iconscout.com/3d/premium/thumb/ai-agency-core-3d-icon-png-download-12002312.png"/>
-          <p:cNvPicPr>
-            <a:picLocks noChangeAspect="1" noChangeArrowheads="1"/>
-          </p:cNvPicPr>
-          <p:nvPr/>
-        </p:nvPicPr>
-        <p:blipFill>
-          <a:blip r:embed="rId3" cstate="print"/>
-          <a:srcRect/>
-          <a:stretch>
-            <a:fillRect/>
-          </a:stretch>
-        </p:blipFill>
-        <p:spPr bwMode="auto">
-          <a:xfrm>
-            <a:off x="3505200" y="3657600"/>
-            <a:ext cx="2143125" cy="2143125"/>
-          </a:xfrm>
-          <a:prstGeom prst="rect">
-            <a:avLst/>
-          </a:prstGeom>
-          <a:noFill/>
         </p:spPr>
       </p:pic>
     </p:spTree>
@@ -6592,71 +6997,16 @@
           <a:chExt cx="0" cy="0"/>
         </a:xfrm>
       </p:grpSpPr>
-      <p:sp>
-        <p:nvSpPr>
-          <p:cNvPr id="2" name="Title 1"/>
-          <p:cNvSpPr>
-            <a:spLocks noGrp="1"/>
-          </p:cNvSpPr>
-          <p:nvPr>
-            <p:ph type="title"/>
-          </p:nvPr>
-        </p:nvSpPr>
-        <p:spPr/>
-        <p:txBody>
-          <a:bodyPr/>
-          <a:lstStyle/>
-          <a:p>
-            <a:r>
-              <a:rPr lang="en-US" smtClean="0"/>
-              <a:t>Code Review </a:t>
-            </a:r>
-            <a:r>
-              <a:rPr lang="en-US" dirty="0" smtClean="0"/>
-              <a:t>Tools</a:t>
-            </a:r>
-            <a:endParaRPr lang="en-US" dirty="0"/>
-          </a:p>
-        </p:txBody>
-      </p:sp>
-      <p:sp>
-        <p:nvSpPr>
-          <p:cNvPr id="3" name="Content Placeholder 2"/>
-          <p:cNvSpPr>
-            <a:spLocks noGrp="1"/>
-          </p:cNvSpPr>
-          <p:nvPr>
-            <p:ph idx="1"/>
-          </p:nvPr>
-        </p:nvSpPr>
-        <p:spPr/>
-        <p:txBody>
-          <a:bodyPr/>
-          <a:lstStyle/>
-          <a:p>
-            <a:r>
-              <a:rPr lang="en-US" dirty="0" smtClean="0">
-                <a:hlinkClick r:id="rId2"/>
-              </a:rPr>
-              <a:t>https://graphite.com/</a:t>
-            </a:r>
-            <a:endParaRPr lang="en-US" dirty="0" smtClean="0"/>
-          </a:p>
-          <a:p>
-            <a:endParaRPr lang="en-US" dirty="0"/>
-          </a:p>
-        </p:txBody>
-      </p:sp>
       <p:pic>
         <p:nvPicPr>
-          <p:cNvPr id="2050" name="Picture 2" descr="https://cdn3d.iconscout.com/3d/premium/thumb/ai-agency-core-3d-icon-png-download-12002312.png"/>
+          <p:cNvPr id="4" name="Picture 2" descr="https://lh3.ggpht.com/1IfZLL2QDSjZ0wS7sUhaMlsAOS8BBzdR3wZ1WawgRn7KZAM8nEVZYMOUM-lqQb0ikIzp=w300"/>
           <p:cNvPicPr>
             <a:picLocks noChangeAspect="1" noChangeArrowheads="1"/>
           </p:cNvPicPr>
           <p:nvPr/>
         </p:nvPicPr>
         <p:blipFill>
-          <a:blip r:embed="rId3" cstate="print"/>
+          <a:blip r:embed="rId2" cstate="print"/>
           <a:srcRect/>
           <a:stretch>
             <a:fillRect/>
@@ -6664,8 +7014,8 @@
         </p:blipFill>
         <p:spPr bwMode="auto">
           <a:xfrm>
-            <a:off x="3505200" y="3657600"/>
-            <a:ext cx="2143125" cy="2143125"/>
+            <a:off x="3276600" y="1905000"/>
+            <a:ext cx="2857500" cy="2857500"/>
           </a:xfrm>
           <a:prstGeom prst="rect">
             <a:avLst/>
@@ -6715,7 +7065,7 @@
           <a:p>
             <a:r>
               <a:rPr lang="en-US" dirty="0" smtClean="0"/>
-              <a:t>Database Schema Refactoring Tools</a:t>
+              <a:t>Generative UI Tools</a:t>
             </a:r>
             <a:endParaRPr lang="en-US" dirty="0"/>
           </a:p>
@@ -6737,15 +7087,15 @@
           <a:lstStyle/>
           <a:p>
             <a:r>
-              <a:rPr lang="en-US" sz="2800" dirty="0" smtClean="0">
+              <a:rPr lang="en-US" smtClean="0">
                 <a:hlinkClick r:id="rId2"/>
               </a:rPr>
-              <a:t>https://neon.com/guides/openai-codex-neon-mcp</a:t>
-            </a:r>
-            <a:endParaRPr lang="en-US" sz="2800" dirty="0" smtClean="0"/>
-          </a:p>
-          <a:p>
-            <a:endParaRPr lang="en-US" sz="2800" dirty="0"/>
+              <a:t>https://v0.dev/</a:t>
+            </a:r>
+            <a:endParaRPr lang="en-US" smtClean="0"/>
+          </a:p>
+          <a:p>
+            <a:endParaRPr lang="en-US"/>
           </a:p>
         </p:txBody>
       </p:sp>
@@ -6800,16 +7150,71 @@
           <a:chExt cx="0" cy="0"/>
         </a:xfrm>
       </p:grpSpPr>
+      <p:sp>
+        <p:nvSpPr>
+          <p:cNvPr id="2" name="Title 1"/>
+          <p:cNvSpPr>
+            <a:spLocks noGrp="1"/>
+          </p:cNvSpPr>
+          <p:nvPr>
+            <p:ph type="title"/>
+          </p:nvPr>
+        </p:nvSpPr>
+        <p:spPr/>
+        <p:txBody>
+          <a:bodyPr/>
+          <a:lstStyle/>
+          <a:p>
+            <a:r>
+              <a:rPr lang="en-US" smtClean="0"/>
+              <a:t>Code Review </a:t>
+            </a:r>
+            <a:r>
+              <a:rPr lang="en-US" dirty="0" smtClean="0"/>
+              <a:t>Tools</a:t>
+            </a:r>
+            <a:endParaRPr lang="en-US" dirty="0"/>
+          </a:p>
+        </p:txBody>
+      </p:sp>
+      <p:sp>
+        <p:nvSpPr>
+          <p:cNvPr id="3" name="Content Placeholder 2"/>
+          <p:cNvSpPr>
+            <a:spLocks noGrp="1"/>
+          </p:cNvSpPr>
+          <p:nvPr>
+            <p:ph idx="1"/>
+          </p:nvPr>
+        </p:nvSpPr>
+        <p:spPr/>
+        <p:txBody>
+          <a:bodyPr/>
+          <a:lstStyle/>
+          <a:p>
+            <a:r>
+              <a:rPr lang="en-US" dirty="0" smtClean="0">
+                <a:hlinkClick r:id="rId2"/>
+              </a:rPr>
+              <a:t>https://graphite.com/</a:t>
+            </a:r>
+            <a:endParaRPr lang="en-US" dirty="0" smtClean="0"/>
+          </a:p>
+          <a:p>
+            <a:endParaRPr lang="en-US" dirty="0"/>
+          </a:p>
+        </p:txBody>
+      </p:sp>
       <p:pic>
         <p:nvPicPr>
-          <p:cNvPr id="4" name="Picture 2" descr="https://lh3.ggpht.com/1IfZLL2QDSjZ0wS7sUhaMlsAOS8BBzdR3wZ1WawgRn7KZAM8nEVZYMOUM-lqQb0ikIzp=w300"/>
+          <p:cNvPr id="2050" name="Picture 2" descr="https://cdn3d.iconscout.com/3d/premium/thumb/ai-agency-core-3d-icon-png-download-12002312.png"/>
           <p:cNvPicPr>
             <a:picLocks noChangeAspect="1" noChangeArrowheads="1"/>
           </p:cNvPicPr>
           <p:nvPr/>
         </p:nvPicPr>
         <p:blipFill>
-          <a:blip r:embed="rId2" cstate="print"/>
+          <a:blip r:embed="rId3" cstate="print"/>
           <a:srcRect/>
           <a:stretch>
             <a:fillRect/>
@@ -6817,8 +7222,8 @@
         </p:blipFill>
         <p:spPr bwMode="auto">
           <a:xfrm>
-            <a:off x="3276600" y="1905000"/>
-            <a:ext cx="2857500" cy="2857500"/>
+            <a:off x="3505200" y="3657600"/>
+            <a:ext cx="2143125" cy="2143125"/>
           </a:xfrm>
           <a:prstGeom prst="rect">
             <a:avLst/>
@@ -6866,10 +7271,9 @@
           <a:bodyPr/>
           <a:lstStyle/>
           <a:p>
-            <a:pPr algn="l"/>
             <a:r>
               <a:rPr lang="en-US" dirty="0" smtClean="0"/>
-              <a:t>1. Install Google Antigravity</a:t>
+              <a:t>Database Schema Refactoring Tools</a:t>
             </a:r>
             <a:endParaRPr lang="en-US" dirty="0"/>
           </a:p>
@@ -6891,18 +7295,44 @@
           <a:lstStyle/>
           <a:p>
             <a:r>
-              <a:rPr lang="en-US" dirty="0" smtClean="0">
+              <a:rPr lang="en-US" sz="2800" dirty="0" smtClean="0">
                 <a:hlinkClick r:id="rId2"/>
               </a:rPr>
-              <a:t>https://antigravity.google/download</a:t>
-            </a:r>
-            <a:endParaRPr lang="en-US" dirty="0" smtClean="0"/>
-          </a:p>
-          <a:p>
-            <a:endParaRPr lang="en-US" dirty="0"/>
-          </a:p>
-        </p:txBody>
-      </p:sp>
+              <a:t>https://neon.com/guides/openai-codex-neon-mcp</a:t>
+            </a:r>
+            <a:endParaRPr lang="en-US" sz="2800" dirty="0" smtClean="0"/>
+          </a:p>
+          <a:p>
+            <a:endParaRPr lang="en-US" sz="2800" dirty="0"/>
+          </a:p>
+        </p:txBody>
+      </p:sp>
+      <p:pic>
+        <p:nvPicPr>
+          <p:cNvPr id="2050" name="Picture 2" descr="https://cdn3d.iconscout.com/3d/premium/thumb/ai-agency-core-3d-icon-png-download-12002312.png"/>
+          <p:cNvPicPr>
+            <a:picLocks noChangeAspect="1" noChangeArrowheads="1"/>
+          </p:cNvPicPr>
+          <p:nvPr/>
+        </p:nvPicPr>
+        <p:blipFill>
+          <a:blip r:embed="rId3" cstate="print"/>
+          <a:srcRect/>
+          <a:stretch>
+            <a:fillRect/>
+          </a:stretch>
+        </p:blipFill>
+        <p:spPr bwMode="auto">
+          <a:xfrm>
+            <a:off x="3505200" y="3657600"/>
+            <a:ext cx="2143125" cy="2143125"/>
+          </a:xfrm>
+          <a:prstGeom prst="rect">
+            <a:avLst/>
+          </a:prstGeom>
+          <a:noFill/>
+        </p:spPr>
+      </p:pic>
     </p:spTree>
   </p:cSld>
   <p:clrMapOvr>
@@ -6997,7 +7427,7 @@
             <a:pPr algn="l"/>
             <a:r>
               <a:rPr lang="en-US" dirty="0" smtClean="0"/>
-              <a:t>1. Register Cline Account</a:t>
+              <a:t>1. Install Google Antigravity</a:t>
             </a:r>
             <a:endParaRPr lang="en-US" dirty="0"/>
           </a:p>
@@ -7022,7 +7452,7 @@
               <a:rPr lang="en-US" dirty="0" smtClean="0">
                 <a:hlinkClick r:id="rId2"/>
               </a:rPr>
-              <a:t>https://cline.bot/pricing</a:t>
+              <a:t>https://antigravity.google/download</a:t>
             </a:r>
             <a:endParaRPr lang="en-US" dirty="0" smtClean="0"/>
           </a:p>
@@ -7040,6 +7470,134 @@
 </file>
 
 <file path=ppt/slides/slide36.xml><?xml version="1.0" encoding="utf-8"?>
+<p:sld xmlns:a="http://schemas.openxmlformats.org/drawingml/2006/main" xmlns:r="http://schemas.openxmlformats.org/officeDocument/2006/relationships" xmlns:p="http://schemas.openxmlformats.org/presentationml/2006/main">
+  <p:cSld>
+    <p:spTree>
+      <p:nvGrpSpPr>
+        <p:cNvPr id="1" name=""/>
+        <p:cNvGrpSpPr/>
+        <p:nvPr/>
+      </p:nvGrpSpPr>
+      <p:grpSpPr>
+        <a:xfrm>
+          <a:off x="0" y="0"/>
+          <a:ext cx="0" cy="0"/>
+          <a:chOff x="0" y="0"/>
+          <a:chExt cx="0" cy="0"/>
+        </a:xfrm>
+      </p:grpSpPr>
+      <p:pic>
+        <p:nvPicPr>
+          <p:cNvPr id="4" name="Picture 2" descr="https://lh3.ggpht.com/1IfZLL2QDSjZ0wS7sUhaMlsAOS8BBzdR3wZ1WawgRn7KZAM8nEVZYMOUM-lqQb0ikIzp=w300"/>
+          <p:cNvPicPr>
+            <a:picLocks noChangeAspect="1" noChangeArrowheads="1"/>
+          </p:cNvPicPr>
+          <p:nvPr/>
+        </p:nvPicPr>
+        <p:blipFill>
+          <a:blip r:embed="rId2" cstate="print"/>
+          <a:srcRect/>
+          <a:stretch>
+            <a:fillRect/>
+          </a:stretch>
+        </p:blipFill>
+        <p:spPr bwMode="auto">
+          <a:xfrm>
+            <a:off x="3276600" y="1905000"/>
+            <a:ext cx="2857500" cy="2857500"/>
+          </a:xfrm>
+          <a:prstGeom prst="rect">
+            <a:avLst/>
+          </a:prstGeom>
+          <a:noFill/>
+        </p:spPr>
+      </p:pic>
+    </p:spTree>
+  </p:cSld>
+  <p:clrMapOvr>
+    <a:masterClrMapping/>
+  </p:clrMapOvr>
+</p:sld>
+</file>
+
+<file path=ppt/slides/slide37.xml><?xml version="1.0" encoding="utf-8"?>
+<p:sld xmlns:a="http://schemas.openxmlformats.org/drawingml/2006/main" xmlns:r="http://schemas.openxmlformats.org/officeDocument/2006/relationships" xmlns:p="http://schemas.openxmlformats.org/presentationml/2006/main">
+  <p:cSld>
+    <p:spTree>
+      <p:nvGrpSpPr>
+        <p:cNvPr id="1" name=""/>
+        <p:cNvGrpSpPr/>
+        <p:nvPr/>
+      </p:nvGrpSpPr>
+      <p:grpSpPr>
+        <a:xfrm>
+          <a:off x="0" y="0"/>
+          <a:ext cx="0" cy="0"/>
+          <a:chOff x="0" y="0"/>
+          <a:chExt cx="0" cy="0"/>
+        </a:xfrm>
+      </p:grpSpPr>
+      <p:sp>
+        <p:nvSpPr>
+          <p:cNvPr id="2" name="Title 1"/>
+          <p:cNvSpPr>
+            <a:spLocks noGrp="1"/>
+          </p:cNvSpPr>
+          <p:nvPr>
+            <p:ph type="title"/>
+          </p:nvPr>
+        </p:nvSpPr>
+        <p:spPr/>
+        <p:txBody>
+          <a:bodyPr/>
+          <a:lstStyle/>
+          <a:p>
+            <a:pPr algn="l"/>
+            <a:r>
+              <a:rPr lang="en-US" dirty="0" smtClean="0"/>
+              <a:t>1. Register Cline Account</a:t>
+            </a:r>
+            <a:endParaRPr lang="en-US" dirty="0"/>
+          </a:p>
+        </p:txBody>
+      </p:sp>
+      <p:sp>
+        <p:nvSpPr>
+          <p:cNvPr id="3" name="Content Placeholder 2"/>
+          <p:cNvSpPr>
+            <a:spLocks noGrp="1"/>
+          </p:cNvSpPr>
+          <p:nvPr>
+            <p:ph idx="1"/>
+          </p:nvPr>
+        </p:nvSpPr>
+        <p:spPr/>
+        <p:txBody>
+          <a:bodyPr/>
+          <a:lstStyle/>
+          <a:p>
+            <a:r>
+              <a:rPr lang="en-US" dirty="0" smtClean="0">
+                <a:hlinkClick r:id="rId2"/>
+              </a:rPr>
+              <a:t>https://cline.bot/pricing</a:t>
+            </a:r>
+            <a:endParaRPr lang="en-US" dirty="0" smtClean="0"/>
+          </a:p>
+          <a:p>
+            <a:endParaRPr lang="en-US" dirty="0"/>
+          </a:p>
+        </p:txBody>
+      </p:sp>
+    </p:spTree>
+  </p:cSld>
+  <p:clrMapOvr>
+    <a:masterClrMapping/>
+  </p:clrMapOvr>
+</p:sld>
+</file>
+
+<file path=ppt/slides/slide38.xml><?xml version="1.0" encoding="utf-8"?>
 <p:sld xmlns:a="http://schemas.openxmlformats.org/drawingml/2006/main" xmlns:r="http://schemas.openxmlformats.org/officeDocument/2006/relationships" xmlns:p="http://schemas.openxmlformats.org/presentationml/2006/main">
   <p:cSld>
     <p:spTree>
@@ -7120,7 +7678,7 @@
 </p:sld>
 </file>
 
-<file path=ppt/slides/slide37.xml><?xml version="1.0" encoding="utf-8"?>
+<file path=ppt/slides/slide39.xml><?xml version="1.0" encoding="utf-8"?>
 <p:sld xmlns:a="http://schemas.openxmlformats.org/drawingml/2006/main" xmlns:r="http://schemas.openxmlformats.org/officeDocument/2006/relationships" xmlns:p="http://schemas.openxmlformats.org/presentationml/2006/main">
   <p:cSld>
     <p:spTree>

--- a/Software Engineering Capstone/05.5. Other Coding Agents.pptx
+++ b/Software Engineering Capstone/05.5. Other Coding Agents.pptx
@@ -5258,6 +5258,14 @@
             <a:r>
               <a:rPr lang="en-US" dirty="0" err="1" smtClean="0"/>
               <a:t>OpenCode</a:t>
+            </a:r>
+            <a:r>
+              <a:rPr lang="en-US" dirty="0" smtClean="0"/>
+              <a:t> and Ask It to Implement the </a:t>
+            </a:r>
+            <a:r>
+              <a:rPr lang="en-US" smtClean="0"/>
+              <a:t>Specification Below</a:t>
             </a:r>
             <a:endParaRPr lang="en-US" dirty="0"/>
           </a:p>
